--- a/topic05-loops/unit-1-lectures/talk-1-iteration-while/a-iteration-while.pptx
+++ b/topic05-loops/unit-1-lectures/talk-1-iteration-while/a-iteration-while.pptx
@@ -5,24 +5,26 @@
     <p:sldMasterId id="2147483660" r:id="rId1"/>
   </p:sldMasterIdLst>
   <p:notesMasterIdLst>
-    <p:notesMasterId r:id="rId17"/>
+    <p:notesMasterId r:id="rId19"/>
   </p:notesMasterIdLst>
   <p:sldIdLst>
     <p:sldId id="256" r:id="rId2"/>
     <p:sldId id="257" r:id="rId3"/>
     <p:sldId id="363" r:id="rId4"/>
     <p:sldId id="372" r:id="rId5"/>
-    <p:sldId id="370" r:id="rId6"/>
-    <p:sldId id="373" r:id="rId7"/>
-    <p:sldId id="396" r:id="rId8"/>
-    <p:sldId id="394" r:id="rId9"/>
-    <p:sldId id="364" r:id="rId10"/>
-    <p:sldId id="382" r:id="rId11"/>
-    <p:sldId id="383" r:id="rId12"/>
-    <p:sldId id="384" r:id="rId13"/>
-    <p:sldId id="397" r:id="rId14"/>
-    <p:sldId id="393" r:id="rId15"/>
-    <p:sldId id="273" r:id="rId16"/>
+    <p:sldId id="398" r:id="rId6"/>
+    <p:sldId id="391" r:id="rId7"/>
+    <p:sldId id="370" r:id="rId8"/>
+    <p:sldId id="373" r:id="rId9"/>
+    <p:sldId id="396" r:id="rId10"/>
+    <p:sldId id="394" r:id="rId11"/>
+    <p:sldId id="364" r:id="rId12"/>
+    <p:sldId id="382" r:id="rId13"/>
+    <p:sldId id="383" r:id="rId14"/>
+    <p:sldId id="384" r:id="rId15"/>
+    <p:sldId id="397" r:id="rId16"/>
+    <p:sldId id="393" r:id="rId17"/>
+    <p:sldId id="273" r:id="rId18"/>
   </p:sldIdLst>
   <p:sldSz cx="9144000" cy="6858000" type="screen4x3"/>
   <p:notesSz cx="6858000" cy="9144000"/>
@@ -1574,6 +1576,10 @@
           </p:nvPr>
         </p:nvSpPr>
         <p:spPr bwMode="auto">
+          <a:xfrm>
+            <a:off x="381000" y="685800"/>
+            <a:ext cx="6096000" cy="3429000"/>
+          </a:xfrm>
           <a:noFill/>
           <a:ln>
             <a:solidFill>
@@ -2157,6 +2163,10 @@
           </p:nvPr>
         </p:nvSpPr>
         <p:spPr bwMode="auto">
+          <a:xfrm>
+            <a:off x="1143000" y="685800"/>
+            <a:ext cx="4572000" cy="3429000"/>
+          </a:xfrm>
           <a:noFill/>
           <a:ln>
             <a:solidFill>
@@ -2222,6 +2232,1172 @@
                 <a:spcPct val="0"/>
               </a:spcBef>
             </a:pPr>
+            <a:endParaRPr lang="en-US" altLang="en-US"/>
+          </a:p>
+        </p:txBody>
+      </p:sp>
+    </p:spTree>
+    <p:extLst>
+      <p:ext uri="{BB962C8B-B14F-4D97-AF65-F5344CB8AC3E}">
+        <p14:creationId xmlns:p14="http://schemas.microsoft.com/office/powerpoint/2010/main" val="402883847"/>
+      </p:ext>
+    </p:extLst>
+  </p:cSld>
+  <p:clrMapOvr>
+    <a:masterClrMapping/>
+  </p:clrMapOvr>
+</p:notes>
+</file>
+
+<file path=ppt/notesSlides/notesSlide4.xml><?xml version="1.0" encoding="utf-8"?>
+<p:notes xmlns:a="http://schemas.openxmlformats.org/drawingml/2006/main" xmlns:r="http://schemas.openxmlformats.org/officeDocument/2006/relationships" xmlns:p="http://schemas.openxmlformats.org/presentationml/2006/main">
+  <p:cSld>
+    <p:spTree>
+      <p:nvGrpSpPr>
+        <p:cNvPr id="1" name=""/>
+        <p:cNvGrpSpPr/>
+        <p:nvPr/>
+      </p:nvGrpSpPr>
+      <p:grpSpPr>
+        <a:xfrm>
+          <a:off x="0" y="0"/>
+          <a:ext cx="0" cy="0"/>
+          <a:chOff x="0" y="0"/>
+          <a:chExt cx="0" cy="0"/>
+        </a:xfrm>
+      </p:grpSpPr>
+      <p:sp>
+        <p:nvSpPr>
+          <p:cNvPr id="58369" name="Rectangle 2"/>
+          <p:cNvSpPr>
+            <a:spLocks noGrp="1" noChangeArrowheads="1"/>
+          </p:cNvSpPr>
+          <p:nvPr>
+            <p:ph type="hdr" sz="quarter"/>
+          </p:nvPr>
+        </p:nvSpPr>
+        <p:spPr bwMode="auto">
+          <a:noFill/>
+          <a:extLst>
+            <a:ext uri="{909E8E84-426E-40DD-AFC4-6F175D3DCCD1}">
+              <a14:hiddenFill xmlns:a14="http://schemas.microsoft.com/office/drawing/2010/main">
+                <a:solidFill>
+                  <a:srgbClr val="FFFFFF"/>
+                </a:solidFill>
+              </a14:hiddenFill>
+            </a:ext>
+            <a:ext uri="{91240B29-F687-4F45-9708-019B960494DF}">
+              <a14:hiddenLine xmlns:a14="http://schemas.microsoft.com/office/drawing/2010/main" w="9525">
+                <a:solidFill>
+                  <a:srgbClr val="000000"/>
+                </a:solidFill>
+                <a:miter lim="800000"/>
+                <a:headEnd/>
+                <a:tailEnd/>
+              </a14:hiddenLine>
+            </a:ext>
+          </a:extLst>
+        </p:spPr>
+        <p:txBody>
+          <a:bodyPr wrap="square" numCol="1" anchor="t" anchorCtr="0" compatLnSpc="1">
+            <a:prstTxWarp prst="textNoShape">
+              <a:avLst/>
+            </a:prstTxWarp>
+          </a:bodyPr>
+          <a:lstStyle>
+            <a:lvl1pPr>
+              <a:defRPr>
+                <a:solidFill>
+                  <a:schemeClr val="tx1"/>
+                </a:solidFill>
+                <a:latin typeface="Calibri" pitchFamily="34" charset="0"/>
+                <a:ea typeface="MS PGothic" pitchFamily="34" charset="-128"/>
+              </a:defRPr>
+            </a:lvl1pPr>
+            <a:lvl2pPr marL="742950" indent="-285750">
+              <a:defRPr>
+                <a:solidFill>
+                  <a:schemeClr val="tx1"/>
+                </a:solidFill>
+                <a:latin typeface="Calibri" pitchFamily="34" charset="0"/>
+                <a:ea typeface="MS PGothic" pitchFamily="34" charset="-128"/>
+              </a:defRPr>
+            </a:lvl2pPr>
+            <a:lvl3pPr marL="1143000" indent="-228600">
+              <a:defRPr>
+                <a:solidFill>
+                  <a:schemeClr val="tx1"/>
+                </a:solidFill>
+                <a:latin typeface="Calibri" pitchFamily="34" charset="0"/>
+                <a:ea typeface="MS PGothic" pitchFamily="34" charset="-128"/>
+              </a:defRPr>
+            </a:lvl3pPr>
+            <a:lvl4pPr marL="1600200" indent="-228600">
+              <a:defRPr>
+                <a:solidFill>
+                  <a:schemeClr val="tx1"/>
+                </a:solidFill>
+                <a:latin typeface="Calibri" pitchFamily="34" charset="0"/>
+                <a:ea typeface="MS PGothic" pitchFamily="34" charset="-128"/>
+              </a:defRPr>
+            </a:lvl4pPr>
+            <a:lvl5pPr marL="2057400" indent="-228600">
+              <a:defRPr>
+                <a:solidFill>
+                  <a:schemeClr val="tx1"/>
+                </a:solidFill>
+                <a:latin typeface="Calibri" pitchFamily="34" charset="0"/>
+                <a:ea typeface="MS PGothic" pitchFamily="34" charset="-128"/>
+              </a:defRPr>
+            </a:lvl5pPr>
+            <a:lvl6pPr marL="2514600" indent="-228600" fontAlgn="base">
+              <a:spcBef>
+                <a:spcPct val="0"/>
+              </a:spcBef>
+              <a:spcAft>
+                <a:spcPct val="0"/>
+              </a:spcAft>
+              <a:defRPr>
+                <a:solidFill>
+                  <a:schemeClr val="tx1"/>
+                </a:solidFill>
+                <a:latin typeface="Calibri" pitchFamily="34" charset="0"/>
+                <a:ea typeface="MS PGothic" pitchFamily="34" charset="-128"/>
+              </a:defRPr>
+            </a:lvl6pPr>
+            <a:lvl7pPr marL="2971800" indent="-228600" fontAlgn="base">
+              <a:spcBef>
+                <a:spcPct val="0"/>
+              </a:spcBef>
+              <a:spcAft>
+                <a:spcPct val="0"/>
+              </a:spcAft>
+              <a:defRPr>
+                <a:solidFill>
+                  <a:schemeClr val="tx1"/>
+                </a:solidFill>
+                <a:latin typeface="Calibri" pitchFamily="34" charset="0"/>
+                <a:ea typeface="MS PGothic" pitchFamily="34" charset="-128"/>
+              </a:defRPr>
+            </a:lvl7pPr>
+            <a:lvl8pPr marL="3429000" indent="-228600" fontAlgn="base">
+              <a:spcBef>
+                <a:spcPct val="0"/>
+              </a:spcBef>
+              <a:spcAft>
+                <a:spcPct val="0"/>
+              </a:spcAft>
+              <a:defRPr>
+                <a:solidFill>
+                  <a:schemeClr val="tx1"/>
+                </a:solidFill>
+                <a:latin typeface="Calibri" pitchFamily="34" charset="0"/>
+                <a:ea typeface="MS PGothic" pitchFamily="34" charset="-128"/>
+              </a:defRPr>
+            </a:lvl8pPr>
+            <a:lvl9pPr marL="3886200" indent="-228600" fontAlgn="base">
+              <a:spcBef>
+                <a:spcPct val="0"/>
+              </a:spcBef>
+              <a:spcAft>
+                <a:spcPct val="0"/>
+              </a:spcAft>
+              <a:defRPr>
+                <a:solidFill>
+                  <a:schemeClr val="tx1"/>
+                </a:solidFill>
+                <a:latin typeface="Calibri" pitchFamily="34" charset="0"/>
+                <a:ea typeface="MS PGothic" pitchFamily="34" charset="-128"/>
+              </a:defRPr>
+            </a:lvl9pPr>
+          </a:lstStyle>
+          <a:p>
+            <a:pPr fontAlgn="base">
+              <a:spcBef>
+                <a:spcPct val="0"/>
+              </a:spcBef>
+              <a:spcAft>
+                <a:spcPct val="0"/>
+              </a:spcAft>
+            </a:pPr>
+            <a:r>
+              <a:rPr lang="en-GB" altLang="en-US"/>
+              <a:t>Objects First with Java</a:t>
+            </a:r>
+          </a:p>
+        </p:txBody>
+      </p:sp>
+      <p:sp>
+        <p:nvSpPr>
+          <p:cNvPr id="58370" name="Rectangle 6"/>
+          <p:cNvSpPr>
+            <a:spLocks noGrp="1" noChangeArrowheads="1"/>
+          </p:cNvSpPr>
+          <p:nvPr>
+            <p:ph type="ftr" sz="quarter" idx="4"/>
+          </p:nvPr>
+        </p:nvSpPr>
+        <p:spPr bwMode="auto">
+          <a:noFill/>
+          <a:extLst>
+            <a:ext uri="{909E8E84-426E-40DD-AFC4-6F175D3DCCD1}">
+              <a14:hiddenFill xmlns:a14="http://schemas.microsoft.com/office/drawing/2010/main">
+                <a:solidFill>
+                  <a:srgbClr val="FFFFFF"/>
+                </a:solidFill>
+              </a14:hiddenFill>
+            </a:ext>
+            <a:ext uri="{91240B29-F687-4F45-9708-019B960494DF}">
+              <a14:hiddenLine xmlns:a14="http://schemas.microsoft.com/office/drawing/2010/main" w="9525">
+                <a:solidFill>
+                  <a:srgbClr val="000000"/>
+                </a:solidFill>
+                <a:miter lim="800000"/>
+                <a:headEnd/>
+                <a:tailEnd/>
+              </a14:hiddenLine>
+            </a:ext>
+          </a:extLst>
+        </p:spPr>
+        <p:txBody>
+          <a:bodyPr wrap="square" numCol="1" anchorCtr="0" compatLnSpc="1">
+            <a:prstTxWarp prst="textNoShape">
+              <a:avLst/>
+            </a:prstTxWarp>
+          </a:bodyPr>
+          <a:lstStyle>
+            <a:lvl1pPr>
+              <a:defRPr>
+                <a:solidFill>
+                  <a:schemeClr val="tx1"/>
+                </a:solidFill>
+                <a:latin typeface="Calibri" pitchFamily="34" charset="0"/>
+                <a:ea typeface="MS PGothic" pitchFamily="34" charset="-128"/>
+              </a:defRPr>
+            </a:lvl1pPr>
+            <a:lvl2pPr marL="742950" indent="-285750">
+              <a:defRPr>
+                <a:solidFill>
+                  <a:schemeClr val="tx1"/>
+                </a:solidFill>
+                <a:latin typeface="Calibri" pitchFamily="34" charset="0"/>
+                <a:ea typeface="MS PGothic" pitchFamily="34" charset="-128"/>
+              </a:defRPr>
+            </a:lvl2pPr>
+            <a:lvl3pPr marL="1143000" indent="-228600">
+              <a:defRPr>
+                <a:solidFill>
+                  <a:schemeClr val="tx1"/>
+                </a:solidFill>
+                <a:latin typeface="Calibri" pitchFamily="34" charset="0"/>
+                <a:ea typeface="MS PGothic" pitchFamily="34" charset="-128"/>
+              </a:defRPr>
+            </a:lvl3pPr>
+            <a:lvl4pPr marL="1600200" indent="-228600">
+              <a:defRPr>
+                <a:solidFill>
+                  <a:schemeClr val="tx1"/>
+                </a:solidFill>
+                <a:latin typeface="Calibri" pitchFamily="34" charset="0"/>
+                <a:ea typeface="MS PGothic" pitchFamily="34" charset="-128"/>
+              </a:defRPr>
+            </a:lvl4pPr>
+            <a:lvl5pPr marL="2057400" indent="-228600">
+              <a:defRPr>
+                <a:solidFill>
+                  <a:schemeClr val="tx1"/>
+                </a:solidFill>
+                <a:latin typeface="Calibri" pitchFamily="34" charset="0"/>
+                <a:ea typeface="MS PGothic" pitchFamily="34" charset="-128"/>
+              </a:defRPr>
+            </a:lvl5pPr>
+            <a:lvl6pPr marL="2514600" indent="-228600" fontAlgn="base">
+              <a:spcBef>
+                <a:spcPct val="0"/>
+              </a:spcBef>
+              <a:spcAft>
+                <a:spcPct val="0"/>
+              </a:spcAft>
+              <a:defRPr>
+                <a:solidFill>
+                  <a:schemeClr val="tx1"/>
+                </a:solidFill>
+                <a:latin typeface="Calibri" pitchFamily="34" charset="0"/>
+                <a:ea typeface="MS PGothic" pitchFamily="34" charset="-128"/>
+              </a:defRPr>
+            </a:lvl6pPr>
+            <a:lvl7pPr marL="2971800" indent="-228600" fontAlgn="base">
+              <a:spcBef>
+                <a:spcPct val="0"/>
+              </a:spcBef>
+              <a:spcAft>
+                <a:spcPct val="0"/>
+              </a:spcAft>
+              <a:defRPr>
+                <a:solidFill>
+                  <a:schemeClr val="tx1"/>
+                </a:solidFill>
+                <a:latin typeface="Calibri" pitchFamily="34" charset="0"/>
+                <a:ea typeface="MS PGothic" pitchFamily="34" charset="-128"/>
+              </a:defRPr>
+            </a:lvl7pPr>
+            <a:lvl8pPr marL="3429000" indent="-228600" fontAlgn="base">
+              <a:spcBef>
+                <a:spcPct val="0"/>
+              </a:spcBef>
+              <a:spcAft>
+                <a:spcPct val="0"/>
+              </a:spcAft>
+              <a:defRPr>
+                <a:solidFill>
+                  <a:schemeClr val="tx1"/>
+                </a:solidFill>
+                <a:latin typeface="Calibri" pitchFamily="34" charset="0"/>
+                <a:ea typeface="MS PGothic" pitchFamily="34" charset="-128"/>
+              </a:defRPr>
+            </a:lvl8pPr>
+            <a:lvl9pPr marL="3886200" indent="-228600" fontAlgn="base">
+              <a:spcBef>
+                <a:spcPct val="0"/>
+              </a:spcBef>
+              <a:spcAft>
+                <a:spcPct val="0"/>
+              </a:spcAft>
+              <a:defRPr>
+                <a:solidFill>
+                  <a:schemeClr val="tx1"/>
+                </a:solidFill>
+                <a:latin typeface="Calibri" pitchFamily="34" charset="0"/>
+                <a:ea typeface="MS PGothic" pitchFamily="34" charset="-128"/>
+              </a:defRPr>
+            </a:lvl9pPr>
+          </a:lstStyle>
+          <a:p>
+            <a:pPr fontAlgn="base">
+              <a:spcBef>
+                <a:spcPct val="0"/>
+              </a:spcBef>
+              <a:spcAft>
+                <a:spcPct val="0"/>
+              </a:spcAft>
+            </a:pPr>
+            <a:r>
+              <a:rPr lang="en-GB" altLang="en-US"/>
+              <a:t>© David J. Barnes and Michael Kölling</a:t>
+            </a:r>
+          </a:p>
+        </p:txBody>
+      </p:sp>
+      <p:sp>
+        <p:nvSpPr>
+          <p:cNvPr id="58371" name="Rectangle 7"/>
+          <p:cNvSpPr>
+            <a:spLocks noGrp="1" noChangeArrowheads="1"/>
+          </p:cNvSpPr>
+          <p:nvPr>
+            <p:ph type="sldNum" sz="quarter" idx="5"/>
+          </p:nvPr>
+        </p:nvSpPr>
+        <p:spPr bwMode="auto">
+          <a:noFill/>
+          <a:extLst>
+            <a:ext uri="{909E8E84-426E-40DD-AFC4-6F175D3DCCD1}">
+              <a14:hiddenFill xmlns:a14="http://schemas.microsoft.com/office/drawing/2010/main">
+                <a:solidFill>
+                  <a:srgbClr val="FFFFFF"/>
+                </a:solidFill>
+              </a14:hiddenFill>
+            </a:ext>
+            <a:ext uri="{91240B29-F687-4F45-9708-019B960494DF}">
+              <a14:hiddenLine xmlns:a14="http://schemas.microsoft.com/office/drawing/2010/main" w="9525">
+                <a:solidFill>
+                  <a:srgbClr val="000000"/>
+                </a:solidFill>
+                <a:miter lim="800000"/>
+                <a:headEnd/>
+                <a:tailEnd/>
+              </a14:hiddenLine>
+            </a:ext>
+          </a:extLst>
+        </p:spPr>
+        <p:txBody>
+          <a:bodyPr/>
+          <a:lstStyle>
+            <a:lvl1pPr>
+              <a:defRPr>
+                <a:solidFill>
+                  <a:schemeClr val="tx1"/>
+                </a:solidFill>
+                <a:latin typeface="Calibri" pitchFamily="34" charset="0"/>
+                <a:ea typeface="MS PGothic" pitchFamily="34" charset="-128"/>
+              </a:defRPr>
+            </a:lvl1pPr>
+            <a:lvl2pPr marL="742950" indent="-285750">
+              <a:defRPr>
+                <a:solidFill>
+                  <a:schemeClr val="tx1"/>
+                </a:solidFill>
+                <a:latin typeface="Calibri" pitchFamily="34" charset="0"/>
+                <a:ea typeface="MS PGothic" pitchFamily="34" charset="-128"/>
+              </a:defRPr>
+            </a:lvl2pPr>
+            <a:lvl3pPr marL="1143000" indent="-228600">
+              <a:defRPr>
+                <a:solidFill>
+                  <a:schemeClr val="tx1"/>
+                </a:solidFill>
+                <a:latin typeface="Calibri" pitchFamily="34" charset="0"/>
+                <a:ea typeface="MS PGothic" pitchFamily="34" charset="-128"/>
+              </a:defRPr>
+            </a:lvl3pPr>
+            <a:lvl4pPr marL="1600200" indent="-228600">
+              <a:defRPr>
+                <a:solidFill>
+                  <a:schemeClr val="tx1"/>
+                </a:solidFill>
+                <a:latin typeface="Calibri" pitchFamily="34" charset="0"/>
+                <a:ea typeface="MS PGothic" pitchFamily="34" charset="-128"/>
+              </a:defRPr>
+            </a:lvl4pPr>
+            <a:lvl5pPr marL="2057400" indent="-228600">
+              <a:defRPr>
+                <a:solidFill>
+                  <a:schemeClr val="tx1"/>
+                </a:solidFill>
+                <a:latin typeface="Calibri" pitchFamily="34" charset="0"/>
+                <a:ea typeface="MS PGothic" pitchFamily="34" charset="-128"/>
+              </a:defRPr>
+            </a:lvl5pPr>
+            <a:lvl6pPr marL="2514600" indent="-228600" fontAlgn="base">
+              <a:spcBef>
+                <a:spcPct val="0"/>
+              </a:spcBef>
+              <a:spcAft>
+                <a:spcPct val="0"/>
+              </a:spcAft>
+              <a:defRPr>
+                <a:solidFill>
+                  <a:schemeClr val="tx1"/>
+                </a:solidFill>
+                <a:latin typeface="Calibri" pitchFamily="34" charset="0"/>
+                <a:ea typeface="MS PGothic" pitchFamily="34" charset="-128"/>
+              </a:defRPr>
+            </a:lvl6pPr>
+            <a:lvl7pPr marL="2971800" indent="-228600" fontAlgn="base">
+              <a:spcBef>
+                <a:spcPct val="0"/>
+              </a:spcBef>
+              <a:spcAft>
+                <a:spcPct val="0"/>
+              </a:spcAft>
+              <a:defRPr>
+                <a:solidFill>
+                  <a:schemeClr val="tx1"/>
+                </a:solidFill>
+                <a:latin typeface="Calibri" pitchFamily="34" charset="0"/>
+                <a:ea typeface="MS PGothic" pitchFamily="34" charset="-128"/>
+              </a:defRPr>
+            </a:lvl7pPr>
+            <a:lvl8pPr marL="3429000" indent="-228600" fontAlgn="base">
+              <a:spcBef>
+                <a:spcPct val="0"/>
+              </a:spcBef>
+              <a:spcAft>
+                <a:spcPct val="0"/>
+              </a:spcAft>
+              <a:defRPr>
+                <a:solidFill>
+                  <a:schemeClr val="tx1"/>
+                </a:solidFill>
+                <a:latin typeface="Calibri" pitchFamily="34" charset="0"/>
+                <a:ea typeface="MS PGothic" pitchFamily="34" charset="-128"/>
+              </a:defRPr>
+            </a:lvl8pPr>
+            <a:lvl9pPr marL="3886200" indent="-228600" fontAlgn="base">
+              <a:spcBef>
+                <a:spcPct val="0"/>
+              </a:spcBef>
+              <a:spcAft>
+                <a:spcPct val="0"/>
+              </a:spcAft>
+              <a:defRPr>
+                <a:solidFill>
+                  <a:schemeClr val="tx1"/>
+                </a:solidFill>
+                <a:latin typeface="Calibri" pitchFamily="34" charset="0"/>
+                <a:ea typeface="MS PGothic" pitchFamily="34" charset="-128"/>
+              </a:defRPr>
+            </a:lvl9pPr>
+          </a:lstStyle>
+          <a:p>
+            <a:fld id="{6F5C823C-3053-4D97-8BDB-829229CD9DB8}" type="slidenum">
+              <a:rPr lang="en-GB" altLang="en-US"/>
+              <a:pPr/>
+              <a:t>7</a:t>
+            </a:fld>
+            <a:endParaRPr lang="en-GB" altLang="en-US"/>
+          </a:p>
+        </p:txBody>
+      </p:sp>
+      <p:sp>
+        <p:nvSpPr>
+          <p:cNvPr id="58372" name="Rectangle 2"/>
+          <p:cNvSpPr>
+            <a:spLocks noGrp="1" noRot="1" noChangeAspect="1" noChangeArrowheads="1" noTextEdit="1"/>
+          </p:cNvSpPr>
+          <p:nvPr>
+            <p:ph type="sldImg"/>
+          </p:nvPr>
+        </p:nvSpPr>
+        <p:spPr bwMode="auto">
+          <a:noFill/>
+          <a:ln>
+            <a:solidFill>
+              <a:srgbClr val="000000"/>
+            </a:solidFill>
+            <a:miter lim="800000"/>
+            <a:headEnd/>
+            <a:tailEnd/>
+          </a:ln>
+          <a:extLst>
+            <a:ext uri="{909E8E84-426E-40DD-AFC4-6F175D3DCCD1}">
+              <a14:hiddenFill xmlns:a14="http://schemas.microsoft.com/office/drawing/2010/main">
+                <a:solidFill>
+                  <a:srgbClr val="FFFFFF"/>
+                </a:solidFill>
+              </a14:hiddenFill>
+            </a:ext>
+          </a:extLst>
+        </p:spPr>
+      </p:sp>
+      <p:sp>
+        <p:nvSpPr>
+          <p:cNvPr id="58373" name="Rectangle 3"/>
+          <p:cNvSpPr>
+            <a:spLocks noGrp="1" noChangeArrowheads="1"/>
+          </p:cNvSpPr>
+          <p:nvPr>
+            <p:ph type="body" idx="1"/>
+          </p:nvPr>
+        </p:nvSpPr>
+        <p:spPr bwMode="auto">
+          <a:noFill/>
+          <a:extLst>
+            <a:ext uri="{909E8E84-426E-40DD-AFC4-6F175D3DCCD1}">
+              <a14:hiddenFill xmlns:a14="http://schemas.microsoft.com/office/drawing/2010/main">
+                <a:solidFill>
+                  <a:srgbClr val="FFFFFF"/>
+                </a:solidFill>
+              </a14:hiddenFill>
+            </a:ext>
+            <a:ext uri="{91240B29-F687-4F45-9708-019B960494DF}">
+              <a14:hiddenLine xmlns:a14="http://schemas.microsoft.com/office/drawing/2010/main" w="9525">
+                <a:solidFill>
+                  <a:srgbClr val="000000"/>
+                </a:solidFill>
+                <a:miter lim="800000"/>
+                <a:headEnd/>
+                <a:tailEnd/>
+              </a14:hiddenLine>
+            </a:ext>
+          </a:extLst>
+        </p:spPr>
+        <p:txBody>
+          <a:bodyPr wrap="square" numCol="1" anchor="t" anchorCtr="0" compatLnSpc="1">
+            <a:prstTxWarp prst="textNoShape">
+              <a:avLst/>
+            </a:prstTxWarp>
+          </a:bodyPr>
+          <a:lstStyle/>
+          <a:p>
+            <a:pPr>
+              <a:spcBef>
+                <a:spcPct val="0"/>
+              </a:spcBef>
+            </a:pPr>
+            <a:endParaRPr lang="en-US" altLang="en-US"/>
+          </a:p>
+        </p:txBody>
+      </p:sp>
+    </p:spTree>
+    <p:extLst>
+      <p:ext uri="{BB962C8B-B14F-4D97-AF65-F5344CB8AC3E}">
+        <p14:creationId xmlns:p14="http://schemas.microsoft.com/office/powerpoint/2010/main" val="871708792"/>
+      </p:ext>
+    </p:extLst>
+  </p:cSld>
+  <p:clrMapOvr>
+    <a:masterClrMapping/>
+  </p:clrMapOvr>
+</p:notes>
+</file>
+
+<file path=ppt/notesSlides/notesSlide5.xml><?xml version="1.0" encoding="utf-8"?>
+<p:notes xmlns:a="http://schemas.openxmlformats.org/drawingml/2006/main" xmlns:r="http://schemas.openxmlformats.org/officeDocument/2006/relationships" xmlns:p="http://schemas.openxmlformats.org/presentationml/2006/main">
+  <p:cSld>
+    <p:spTree>
+      <p:nvGrpSpPr>
+        <p:cNvPr id="1" name=""/>
+        <p:cNvGrpSpPr/>
+        <p:nvPr/>
+      </p:nvGrpSpPr>
+      <p:grpSpPr>
+        <a:xfrm>
+          <a:off x="0" y="0"/>
+          <a:ext cx="0" cy="0"/>
+          <a:chOff x="0" y="0"/>
+          <a:chExt cx="0" cy="0"/>
+        </a:xfrm>
+      </p:grpSpPr>
+      <p:sp>
+        <p:nvSpPr>
+          <p:cNvPr id="58369" name="Rectangle 2"/>
+          <p:cNvSpPr>
+            <a:spLocks noGrp="1" noChangeArrowheads="1"/>
+          </p:cNvSpPr>
+          <p:nvPr>
+            <p:ph type="hdr" sz="quarter"/>
+          </p:nvPr>
+        </p:nvSpPr>
+        <p:spPr bwMode="auto">
+          <a:noFill/>
+          <a:extLst>
+            <a:ext uri="{909E8E84-426E-40DD-AFC4-6F175D3DCCD1}">
+              <a14:hiddenFill xmlns:a14="http://schemas.microsoft.com/office/drawing/2010/main">
+                <a:solidFill>
+                  <a:srgbClr val="FFFFFF"/>
+                </a:solidFill>
+              </a14:hiddenFill>
+            </a:ext>
+            <a:ext uri="{91240B29-F687-4F45-9708-019B960494DF}">
+              <a14:hiddenLine xmlns:a14="http://schemas.microsoft.com/office/drawing/2010/main" w="9525">
+                <a:solidFill>
+                  <a:srgbClr val="000000"/>
+                </a:solidFill>
+                <a:miter lim="800000"/>
+                <a:headEnd/>
+                <a:tailEnd/>
+              </a14:hiddenLine>
+            </a:ext>
+          </a:extLst>
+        </p:spPr>
+        <p:txBody>
+          <a:bodyPr wrap="square" numCol="1" anchor="t" anchorCtr="0" compatLnSpc="1">
+            <a:prstTxWarp prst="textNoShape">
+              <a:avLst/>
+            </a:prstTxWarp>
+          </a:bodyPr>
+          <a:lstStyle>
+            <a:lvl1pPr>
+              <a:defRPr>
+                <a:solidFill>
+                  <a:schemeClr val="tx1"/>
+                </a:solidFill>
+                <a:latin typeface="Calibri" pitchFamily="34" charset="0"/>
+                <a:ea typeface="MS PGothic" pitchFamily="34" charset="-128"/>
+              </a:defRPr>
+            </a:lvl1pPr>
+            <a:lvl2pPr marL="742950" indent="-285750">
+              <a:defRPr>
+                <a:solidFill>
+                  <a:schemeClr val="tx1"/>
+                </a:solidFill>
+                <a:latin typeface="Calibri" pitchFamily="34" charset="0"/>
+                <a:ea typeface="MS PGothic" pitchFamily="34" charset="-128"/>
+              </a:defRPr>
+            </a:lvl2pPr>
+            <a:lvl3pPr marL="1143000" indent="-228600">
+              <a:defRPr>
+                <a:solidFill>
+                  <a:schemeClr val="tx1"/>
+                </a:solidFill>
+                <a:latin typeface="Calibri" pitchFamily="34" charset="0"/>
+                <a:ea typeface="MS PGothic" pitchFamily="34" charset="-128"/>
+              </a:defRPr>
+            </a:lvl3pPr>
+            <a:lvl4pPr marL="1600200" indent="-228600">
+              <a:defRPr>
+                <a:solidFill>
+                  <a:schemeClr val="tx1"/>
+                </a:solidFill>
+                <a:latin typeface="Calibri" pitchFamily="34" charset="0"/>
+                <a:ea typeface="MS PGothic" pitchFamily="34" charset="-128"/>
+              </a:defRPr>
+            </a:lvl4pPr>
+            <a:lvl5pPr marL="2057400" indent="-228600">
+              <a:defRPr>
+                <a:solidFill>
+                  <a:schemeClr val="tx1"/>
+                </a:solidFill>
+                <a:latin typeface="Calibri" pitchFamily="34" charset="0"/>
+                <a:ea typeface="MS PGothic" pitchFamily="34" charset="-128"/>
+              </a:defRPr>
+            </a:lvl5pPr>
+            <a:lvl6pPr marL="2514600" indent="-228600" fontAlgn="base">
+              <a:spcBef>
+                <a:spcPct val="0"/>
+              </a:spcBef>
+              <a:spcAft>
+                <a:spcPct val="0"/>
+              </a:spcAft>
+              <a:defRPr>
+                <a:solidFill>
+                  <a:schemeClr val="tx1"/>
+                </a:solidFill>
+                <a:latin typeface="Calibri" pitchFamily="34" charset="0"/>
+                <a:ea typeface="MS PGothic" pitchFamily="34" charset="-128"/>
+              </a:defRPr>
+            </a:lvl6pPr>
+            <a:lvl7pPr marL="2971800" indent="-228600" fontAlgn="base">
+              <a:spcBef>
+                <a:spcPct val="0"/>
+              </a:spcBef>
+              <a:spcAft>
+                <a:spcPct val="0"/>
+              </a:spcAft>
+              <a:defRPr>
+                <a:solidFill>
+                  <a:schemeClr val="tx1"/>
+                </a:solidFill>
+                <a:latin typeface="Calibri" pitchFamily="34" charset="0"/>
+                <a:ea typeface="MS PGothic" pitchFamily="34" charset="-128"/>
+              </a:defRPr>
+            </a:lvl7pPr>
+            <a:lvl8pPr marL="3429000" indent="-228600" fontAlgn="base">
+              <a:spcBef>
+                <a:spcPct val="0"/>
+              </a:spcBef>
+              <a:spcAft>
+                <a:spcPct val="0"/>
+              </a:spcAft>
+              <a:defRPr>
+                <a:solidFill>
+                  <a:schemeClr val="tx1"/>
+                </a:solidFill>
+                <a:latin typeface="Calibri" pitchFamily="34" charset="0"/>
+                <a:ea typeface="MS PGothic" pitchFamily="34" charset="-128"/>
+              </a:defRPr>
+            </a:lvl8pPr>
+            <a:lvl9pPr marL="3886200" indent="-228600" fontAlgn="base">
+              <a:spcBef>
+                <a:spcPct val="0"/>
+              </a:spcBef>
+              <a:spcAft>
+                <a:spcPct val="0"/>
+              </a:spcAft>
+              <a:defRPr>
+                <a:solidFill>
+                  <a:schemeClr val="tx1"/>
+                </a:solidFill>
+                <a:latin typeface="Calibri" pitchFamily="34" charset="0"/>
+                <a:ea typeface="MS PGothic" pitchFamily="34" charset="-128"/>
+              </a:defRPr>
+            </a:lvl9pPr>
+          </a:lstStyle>
+          <a:p>
+            <a:pPr fontAlgn="base">
+              <a:spcBef>
+                <a:spcPct val="0"/>
+              </a:spcBef>
+              <a:spcAft>
+                <a:spcPct val="0"/>
+              </a:spcAft>
+            </a:pPr>
+            <a:r>
+              <a:rPr lang="en-GB" altLang="en-US"/>
+              <a:t>Objects First with Java</a:t>
+            </a:r>
+          </a:p>
+        </p:txBody>
+      </p:sp>
+      <p:sp>
+        <p:nvSpPr>
+          <p:cNvPr id="58370" name="Rectangle 6"/>
+          <p:cNvSpPr>
+            <a:spLocks noGrp="1" noChangeArrowheads="1"/>
+          </p:cNvSpPr>
+          <p:nvPr>
+            <p:ph type="ftr" sz="quarter" idx="4"/>
+          </p:nvPr>
+        </p:nvSpPr>
+        <p:spPr bwMode="auto">
+          <a:noFill/>
+          <a:extLst>
+            <a:ext uri="{909E8E84-426E-40DD-AFC4-6F175D3DCCD1}">
+              <a14:hiddenFill xmlns:a14="http://schemas.microsoft.com/office/drawing/2010/main">
+                <a:solidFill>
+                  <a:srgbClr val="FFFFFF"/>
+                </a:solidFill>
+              </a14:hiddenFill>
+            </a:ext>
+            <a:ext uri="{91240B29-F687-4F45-9708-019B960494DF}">
+              <a14:hiddenLine xmlns:a14="http://schemas.microsoft.com/office/drawing/2010/main" w="9525">
+                <a:solidFill>
+                  <a:srgbClr val="000000"/>
+                </a:solidFill>
+                <a:miter lim="800000"/>
+                <a:headEnd/>
+                <a:tailEnd/>
+              </a14:hiddenLine>
+            </a:ext>
+          </a:extLst>
+        </p:spPr>
+        <p:txBody>
+          <a:bodyPr wrap="square" numCol="1" anchorCtr="0" compatLnSpc="1">
+            <a:prstTxWarp prst="textNoShape">
+              <a:avLst/>
+            </a:prstTxWarp>
+          </a:bodyPr>
+          <a:lstStyle>
+            <a:lvl1pPr>
+              <a:defRPr>
+                <a:solidFill>
+                  <a:schemeClr val="tx1"/>
+                </a:solidFill>
+                <a:latin typeface="Calibri" pitchFamily="34" charset="0"/>
+                <a:ea typeface="MS PGothic" pitchFamily="34" charset="-128"/>
+              </a:defRPr>
+            </a:lvl1pPr>
+            <a:lvl2pPr marL="742950" indent="-285750">
+              <a:defRPr>
+                <a:solidFill>
+                  <a:schemeClr val="tx1"/>
+                </a:solidFill>
+                <a:latin typeface="Calibri" pitchFamily="34" charset="0"/>
+                <a:ea typeface="MS PGothic" pitchFamily="34" charset="-128"/>
+              </a:defRPr>
+            </a:lvl2pPr>
+            <a:lvl3pPr marL="1143000" indent="-228600">
+              <a:defRPr>
+                <a:solidFill>
+                  <a:schemeClr val="tx1"/>
+                </a:solidFill>
+                <a:latin typeface="Calibri" pitchFamily="34" charset="0"/>
+                <a:ea typeface="MS PGothic" pitchFamily="34" charset="-128"/>
+              </a:defRPr>
+            </a:lvl3pPr>
+            <a:lvl4pPr marL="1600200" indent="-228600">
+              <a:defRPr>
+                <a:solidFill>
+                  <a:schemeClr val="tx1"/>
+                </a:solidFill>
+                <a:latin typeface="Calibri" pitchFamily="34" charset="0"/>
+                <a:ea typeface="MS PGothic" pitchFamily="34" charset="-128"/>
+              </a:defRPr>
+            </a:lvl4pPr>
+            <a:lvl5pPr marL="2057400" indent="-228600">
+              <a:defRPr>
+                <a:solidFill>
+                  <a:schemeClr val="tx1"/>
+                </a:solidFill>
+                <a:latin typeface="Calibri" pitchFamily="34" charset="0"/>
+                <a:ea typeface="MS PGothic" pitchFamily="34" charset="-128"/>
+              </a:defRPr>
+            </a:lvl5pPr>
+            <a:lvl6pPr marL="2514600" indent="-228600" fontAlgn="base">
+              <a:spcBef>
+                <a:spcPct val="0"/>
+              </a:spcBef>
+              <a:spcAft>
+                <a:spcPct val="0"/>
+              </a:spcAft>
+              <a:defRPr>
+                <a:solidFill>
+                  <a:schemeClr val="tx1"/>
+                </a:solidFill>
+                <a:latin typeface="Calibri" pitchFamily="34" charset="0"/>
+                <a:ea typeface="MS PGothic" pitchFamily="34" charset="-128"/>
+              </a:defRPr>
+            </a:lvl6pPr>
+            <a:lvl7pPr marL="2971800" indent="-228600" fontAlgn="base">
+              <a:spcBef>
+                <a:spcPct val="0"/>
+              </a:spcBef>
+              <a:spcAft>
+                <a:spcPct val="0"/>
+              </a:spcAft>
+              <a:defRPr>
+                <a:solidFill>
+                  <a:schemeClr val="tx1"/>
+                </a:solidFill>
+                <a:latin typeface="Calibri" pitchFamily="34" charset="0"/>
+                <a:ea typeface="MS PGothic" pitchFamily="34" charset="-128"/>
+              </a:defRPr>
+            </a:lvl7pPr>
+            <a:lvl8pPr marL="3429000" indent="-228600" fontAlgn="base">
+              <a:spcBef>
+                <a:spcPct val="0"/>
+              </a:spcBef>
+              <a:spcAft>
+                <a:spcPct val="0"/>
+              </a:spcAft>
+              <a:defRPr>
+                <a:solidFill>
+                  <a:schemeClr val="tx1"/>
+                </a:solidFill>
+                <a:latin typeface="Calibri" pitchFamily="34" charset="0"/>
+                <a:ea typeface="MS PGothic" pitchFamily="34" charset="-128"/>
+              </a:defRPr>
+            </a:lvl8pPr>
+            <a:lvl9pPr marL="3886200" indent="-228600" fontAlgn="base">
+              <a:spcBef>
+                <a:spcPct val="0"/>
+              </a:spcBef>
+              <a:spcAft>
+                <a:spcPct val="0"/>
+              </a:spcAft>
+              <a:defRPr>
+                <a:solidFill>
+                  <a:schemeClr val="tx1"/>
+                </a:solidFill>
+                <a:latin typeface="Calibri" pitchFamily="34" charset="0"/>
+                <a:ea typeface="MS PGothic" pitchFamily="34" charset="-128"/>
+              </a:defRPr>
+            </a:lvl9pPr>
+          </a:lstStyle>
+          <a:p>
+            <a:pPr fontAlgn="base">
+              <a:spcBef>
+                <a:spcPct val="0"/>
+              </a:spcBef>
+              <a:spcAft>
+                <a:spcPct val="0"/>
+              </a:spcAft>
+            </a:pPr>
+            <a:r>
+              <a:rPr lang="en-GB" altLang="en-US"/>
+              <a:t>© David J. Barnes and Michael Kölling</a:t>
+            </a:r>
+          </a:p>
+        </p:txBody>
+      </p:sp>
+      <p:sp>
+        <p:nvSpPr>
+          <p:cNvPr id="58371" name="Rectangle 7"/>
+          <p:cNvSpPr>
+            <a:spLocks noGrp="1" noChangeArrowheads="1"/>
+          </p:cNvSpPr>
+          <p:nvPr>
+            <p:ph type="sldNum" sz="quarter" idx="5"/>
+          </p:nvPr>
+        </p:nvSpPr>
+        <p:spPr bwMode="auto">
+          <a:noFill/>
+          <a:extLst>
+            <a:ext uri="{909E8E84-426E-40DD-AFC4-6F175D3DCCD1}">
+              <a14:hiddenFill xmlns:a14="http://schemas.microsoft.com/office/drawing/2010/main">
+                <a:solidFill>
+                  <a:srgbClr val="FFFFFF"/>
+                </a:solidFill>
+              </a14:hiddenFill>
+            </a:ext>
+            <a:ext uri="{91240B29-F687-4F45-9708-019B960494DF}">
+              <a14:hiddenLine xmlns:a14="http://schemas.microsoft.com/office/drawing/2010/main" w="9525">
+                <a:solidFill>
+                  <a:srgbClr val="000000"/>
+                </a:solidFill>
+                <a:miter lim="800000"/>
+                <a:headEnd/>
+                <a:tailEnd/>
+              </a14:hiddenLine>
+            </a:ext>
+          </a:extLst>
+        </p:spPr>
+        <p:txBody>
+          <a:bodyPr/>
+          <a:lstStyle>
+            <a:lvl1pPr>
+              <a:defRPr>
+                <a:solidFill>
+                  <a:schemeClr val="tx1"/>
+                </a:solidFill>
+                <a:latin typeface="Calibri" pitchFamily="34" charset="0"/>
+                <a:ea typeface="MS PGothic" pitchFamily="34" charset="-128"/>
+              </a:defRPr>
+            </a:lvl1pPr>
+            <a:lvl2pPr marL="742950" indent="-285750">
+              <a:defRPr>
+                <a:solidFill>
+                  <a:schemeClr val="tx1"/>
+                </a:solidFill>
+                <a:latin typeface="Calibri" pitchFamily="34" charset="0"/>
+                <a:ea typeface="MS PGothic" pitchFamily="34" charset="-128"/>
+              </a:defRPr>
+            </a:lvl2pPr>
+            <a:lvl3pPr marL="1143000" indent="-228600">
+              <a:defRPr>
+                <a:solidFill>
+                  <a:schemeClr val="tx1"/>
+                </a:solidFill>
+                <a:latin typeface="Calibri" pitchFamily="34" charset="0"/>
+                <a:ea typeface="MS PGothic" pitchFamily="34" charset="-128"/>
+              </a:defRPr>
+            </a:lvl3pPr>
+            <a:lvl4pPr marL="1600200" indent="-228600">
+              <a:defRPr>
+                <a:solidFill>
+                  <a:schemeClr val="tx1"/>
+                </a:solidFill>
+                <a:latin typeface="Calibri" pitchFamily="34" charset="0"/>
+                <a:ea typeface="MS PGothic" pitchFamily="34" charset="-128"/>
+              </a:defRPr>
+            </a:lvl4pPr>
+            <a:lvl5pPr marL="2057400" indent="-228600">
+              <a:defRPr>
+                <a:solidFill>
+                  <a:schemeClr val="tx1"/>
+                </a:solidFill>
+                <a:latin typeface="Calibri" pitchFamily="34" charset="0"/>
+                <a:ea typeface="MS PGothic" pitchFamily="34" charset="-128"/>
+              </a:defRPr>
+            </a:lvl5pPr>
+            <a:lvl6pPr marL="2514600" indent="-228600" fontAlgn="base">
+              <a:spcBef>
+                <a:spcPct val="0"/>
+              </a:spcBef>
+              <a:spcAft>
+                <a:spcPct val="0"/>
+              </a:spcAft>
+              <a:defRPr>
+                <a:solidFill>
+                  <a:schemeClr val="tx1"/>
+                </a:solidFill>
+                <a:latin typeface="Calibri" pitchFamily="34" charset="0"/>
+                <a:ea typeface="MS PGothic" pitchFamily="34" charset="-128"/>
+              </a:defRPr>
+            </a:lvl6pPr>
+            <a:lvl7pPr marL="2971800" indent="-228600" fontAlgn="base">
+              <a:spcBef>
+                <a:spcPct val="0"/>
+              </a:spcBef>
+              <a:spcAft>
+                <a:spcPct val="0"/>
+              </a:spcAft>
+              <a:defRPr>
+                <a:solidFill>
+                  <a:schemeClr val="tx1"/>
+                </a:solidFill>
+                <a:latin typeface="Calibri" pitchFamily="34" charset="0"/>
+                <a:ea typeface="MS PGothic" pitchFamily="34" charset="-128"/>
+              </a:defRPr>
+            </a:lvl7pPr>
+            <a:lvl8pPr marL="3429000" indent="-228600" fontAlgn="base">
+              <a:spcBef>
+                <a:spcPct val="0"/>
+              </a:spcBef>
+              <a:spcAft>
+                <a:spcPct val="0"/>
+              </a:spcAft>
+              <a:defRPr>
+                <a:solidFill>
+                  <a:schemeClr val="tx1"/>
+                </a:solidFill>
+                <a:latin typeface="Calibri" pitchFamily="34" charset="0"/>
+                <a:ea typeface="MS PGothic" pitchFamily="34" charset="-128"/>
+              </a:defRPr>
+            </a:lvl8pPr>
+            <a:lvl9pPr marL="3886200" indent="-228600" fontAlgn="base">
+              <a:spcBef>
+                <a:spcPct val="0"/>
+              </a:spcBef>
+              <a:spcAft>
+                <a:spcPct val="0"/>
+              </a:spcAft>
+              <a:defRPr>
+                <a:solidFill>
+                  <a:schemeClr val="tx1"/>
+                </a:solidFill>
+                <a:latin typeface="Calibri" pitchFamily="34" charset="0"/>
+                <a:ea typeface="MS PGothic" pitchFamily="34" charset="-128"/>
+              </a:defRPr>
+            </a:lvl9pPr>
+          </a:lstStyle>
+          <a:p>
+            <a:fld id="{6F5C823C-3053-4D97-8BDB-829229CD9DB8}" type="slidenum">
+              <a:rPr lang="en-GB" altLang="en-US"/>
+              <a:pPr/>
+              <a:t>8</a:t>
+            </a:fld>
+            <a:endParaRPr lang="en-GB" altLang="en-US"/>
+          </a:p>
+        </p:txBody>
+      </p:sp>
+      <p:sp>
+        <p:nvSpPr>
+          <p:cNvPr id="58372" name="Rectangle 2"/>
+          <p:cNvSpPr>
+            <a:spLocks noGrp="1" noRot="1" noChangeAspect="1" noChangeArrowheads="1" noTextEdit="1"/>
+          </p:cNvSpPr>
+          <p:nvPr>
+            <p:ph type="sldImg"/>
+          </p:nvPr>
+        </p:nvSpPr>
+        <p:spPr bwMode="auto">
+          <a:noFill/>
+          <a:ln>
+            <a:solidFill>
+              <a:srgbClr val="000000"/>
+            </a:solidFill>
+            <a:miter lim="800000"/>
+            <a:headEnd/>
+            <a:tailEnd/>
+          </a:ln>
+          <a:extLst>
+            <a:ext uri="{909E8E84-426E-40DD-AFC4-6F175D3DCCD1}">
+              <a14:hiddenFill xmlns:a14="http://schemas.microsoft.com/office/drawing/2010/main">
+                <a:solidFill>
+                  <a:srgbClr val="FFFFFF"/>
+                </a:solidFill>
+              </a14:hiddenFill>
+            </a:ext>
+          </a:extLst>
+        </p:spPr>
+      </p:sp>
+      <p:sp>
+        <p:nvSpPr>
+          <p:cNvPr id="58373" name="Rectangle 3"/>
+          <p:cNvSpPr>
+            <a:spLocks noGrp="1" noChangeArrowheads="1"/>
+          </p:cNvSpPr>
+          <p:nvPr>
+            <p:ph type="body" idx="1"/>
+          </p:nvPr>
+        </p:nvSpPr>
+        <p:spPr bwMode="auto">
+          <a:noFill/>
+          <a:extLst>
+            <a:ext uri="{909E8E84-426E-40DD-AFC4-6F175D3DCCD1}">
+              <a14:hiddenFill xmlns:a14="http://schemas.microsoft.com/office/drawing/2010/main">
+                <a:solidFill>
+                  <a:srgbClr val="FFFFFF"/>
+                </a:solidFill>
+              </a14:hiddenFill>
+            </a:ext>
+            <a:ext uri="{91240B29-F687-4F45-9708-019B960494DF}">
+              <a14:hiddenLine xmlns:a14="http://schemas.microsoft.com/office/drawing/2010/main" w="9525">
+                <a:solidFill>
+                  <a:srgbClr val="000000"/>
+                </a:solidFill>
+                <a:miter lim="800000"/>
+                <a:headEnd/>
+                <a:tailEnd/>
+              </a14:hiddenLine>
+            </a:ext>
+          </a:extLst>
+        </p:spPr>
+        <p:txBody>
+          <a:bodyPr wrap="square" numCol="1" anchor="t" anchorCtr="0" compatLnSpc="1">
+            <a:prstTxWarp prst="textNoShape">
+              <a:avLst/>
+            </a:prstTxWarp>
+          </a:bodyPr>
+          <a:lstStyle/>
+          <a:p>
+            <a:pPr>
+              <a:spcBef>
+                <a:spcPct val="0"/>
+              </a:spcBef>
+            </a:pPr>
             <a:r>
               <a:rPr lang="en-US" altLang="en-US" dirty="0"/>
               <a:t>We add 20 because its 10 for the height</a:t>
@@ -2247,7 +3423,7 @@
 </p:notes>
 </file>
 
-<file path=ppt/notesSlides/notesSlide4.xml><?xml version="1.0" encoding="utf-8"?>
+<file path=ppt/notesSlides/notesSlide6.xml><?xml version="1.0" encoding="utf-8"?>
 <p:notes xmlns:a="http://schemas.openxmlformats.org/drawingml/2006/main" xmlns:r="http://schemas.openxmlformats.org/officeDocument/2006/relationships" xmlns:p="http://schemas.openxmlformats.org/presentationml/2006/main">
   <p:cSld>
     <p:spTree>
@@ -2755,7 +3931,7 @@
             <a:fld id="{6F5C823C-3053-4D97-8BDB-829229CD9DB8}" type="slidenum">
               <a:rPr lang="en-GB" altLang="en-US"/>
               <a:pPr/>
-              <a:t>7</a:t>
+              <a:t>9</a:t>
             </a:fld>
             <a:endParaRPr lang="en-GB" altLang="en-US"/>
           </a:p>
@@ -2865,734 +4041,6 @@
     <p:extLst>
       <p:ext uri="{BB962C8B-B14F-4D97-AF65-F5344CB8AC3E}">
         <p14:creationId xmlns:p14="http://schemas.microsoft.com/office/powerpoint/2010/main" val="3237210400"/>
-      </p:ext>
-    </p:extLst>
-  </p:cSld>
-  <p:clrMapOvr>
-    <a:masterClrMapping/>
-  </p:clrMapOvr>
-</p:notes>
-</file>
-
-<file path=ppt/notesSlides/notesSlide5.xml><?xml version="1.0" encoding="utf-8"?>
-<p:notes xmlns:a="http://schemas.openxmlformats.org/drawingml/2006/main" xmlns:r="http://schemas.openxmlformats.org/officeDocument/2006/relationships" xmlns:p="http://schemas.openxmlformats.org/presentationml/2006/main">
-  <p:cSld>
-    <p:spTree>
-      <p:nvGrpSpPr>
-        <p:cNvPr id="1" name=""/>
-        <p:cNvGrpSpPr/>
-        <p:nvPr/>
-      </p:nvGrpSpPr>
-      <p:grpSpPr>
-        <a:xfrm>
-          <a:off x="0" y="0"/>
-          <a:ext cx="0" cy="0"/>
-          <a:chOff x="0" y="0"/>
-          <a:chExt cx="0" cy="0"/>
-        </a:xfrm>
-      </p:grpSpPr>
-      <p:sp>
-        <p:nvSpPr>
-          <p:cNvPr id="4" name="Rectangle 2"/>
-          <p:cNvSpPr>
-            <a:spLocks noGrp="1" noChangeArrowheads="1"/>
-          </p:cNvSpPr>
-          <p:nvPr>
-            <p:ph type="hdr" sz="quarter"/>
-          </p:nvPr>
-        </p:nvSpPr>
-        <p:spPr>
-          <a:ln/>
-        </p:spPr>
-        <p:txBody>
-          <a:bodyPr/>
-          <a:lstStyle/>
-          <a:p>
-            <a:r>
-              <a:rPr lang="en-GB"/>
-              <a:t>Objects First with Java</a:t>
-            </a:r>
-          </a:p>
-        </p:txBody>
-      </p:sp>
-      <p:sp>
-        <p:nvSpPr>
-          <p:cNvPr id="5" name="Rectangle 6"/>
-          <p:cNvSpPr>
-            <a:spLocks noGrp="1" noChangeArrowheads="1"/>
-          </p:cNvSpPr>
-          <p:nvPr>
-            <p:ph type="ftr" sz="quarter" idx="4"/>
-          </p:nvPr>
-        </p:nvSpPr>
-        <p:spPr>
-          <a:ln/>
-        </p:spPr>
-        <p:txBody>
-          <a:bodyPr/>
-          <a:lstStyle/>
-          <a:p>
-            <a:r>
-              <a:rPr lang="en-GB"/>
-              <a:t>© David J. Barnes and Michael Kölling</a:t>
-            </a:r>
-          </a:p>
-        </p:txBody>
-      </p:sp>
-      <p:sp>
-        <p:nvSpPr>
-          <p:cNvPr id="6" name="Rectangle 7"/>
-          <p:cNvSpPr>
-            <a:spLocks noGrp="1" noChangeArrowheads="1"/>
-          </p:cNvSpPr>
-          <p:nvPr>
-            <p:ph type="sldNum" sz="quarter" idx="5"/>
-          </p:nvPr>
-        </p:nvSpPr>
-        <p:spPr>
-          <a:ln/>
-        </p:spPr>
-        <p:txBody>
-          <a:bodyPr/>
-          <a:lstStyle/>
-          <a:p>
-            <a:fld id="{08D00790-568A-44AB-A948-643E31985A48}" type="slidenum">
-              <a:rPr lang="en-GB"/>
-              <a:pPr/>
-              <a:t>10</a:t>
-            </a:fld>
-            <a:endParaRPr lang="en-GB"/>
-          </a:p>
-        </p:txBody>
-      </p:sp>
-      <p:sp>
-        <p:nvSpPr>
-          <p:cNvPr id="140290" name="Rectangle 2"/>
-          <p:cNvSpPr>
-            <a:spLocks noGrp="1" noRot="1" noChangeAspect="1" noChangeArrowheads="1" noTextEdit="1"/>
-          </p:cNvSpPr>
-          <p:nvPr>
-            <p:ph type="sldImg"/>
-          </p:nvPr>
-        </p:nvSpPr>
-        <p:spPr>
-          <a:ln/>
-        </p:spPr>
-      </p:sp>
-      <p:sp>
-        <p:nvSpPr>
-          <p:cNvPr id="140291" name="Rectangle 3"/>
-          <p:cNvSpPr>
-            <a:spLocks noGrp="1" noChangeArrowheads="1"/>
-          </p:cNvSpPr>
-          <p:nvPr>
-            <p:ph type="body" idx="1"/>
-          </p:nvPr>
-        </p:nvSpPr>
-        <p:spPr>
-          <a:xfrm>
-            <a:off x="914400" y="4343400"/>
-            <a:ext cx="1195388" cy="274638"/>
-          </a:xfrm>
-        </p:spPr>
-        <p:txBody>
-          <a:bodyPr/>
-          <a:lstStyle/>
-          <a:p>
-            <a:endParaRPr lang="en-US" dirty="0"/>
-          </a:p>
-        </p:txBody>
-      </p:sp>
-    </p:spTree>
-    <p:extLst>
-      <p:ext uri="{BB962C8B-B14F-4D97-AF65-F5344CB8AC3E}">
-        <p14:creationId xmlns:p14="http://schemas.microsoft.com/office/powerpoint/2010/main" val="610162622"/>
-      </p:ext>
-    </p:extLst>
-  </p:cSld>
-  <p:clrMapOvr>
-    <a:masterClrMapping/>
-  </p:clrMapOvr>
-</p:notes>
-</file>
-
-<file path=ppt/notesSlides/notesSlide6.xml><?xml version="1.0" encoding="utf-8"?>
-<p:notes xmlns:a="http://schemas.openxmlformats.org/drawingml/2006/main" xmlns:r="http://schemas.openxmlformats.org/officeDocument/2006/relationships" xmlns:p="http://schemas.openxmlformats.org/presentationml/2006/main">
-  <p:cSld>
-    <p:spTree>
-      <p:nvGrpSpPr>
-        <p:cNvPr id="1" name=""/>
-        <p:cNvGrpSpPr/>
-        <p:nvPr/>
-      </p:nvGrpSpPr>
-      <p:grpSpPr>
-        <a:xfrm>
-          <a:off x="0" y="0"/>
-          <a:ext cx="0" cy="0"/>
-          <a:chOff x="0" y="0"/>
-          <a:chExt cx="0" cy="0"/>
-        </a:xfrm>
-      </p:grpSpPr>
-      <p:sp>
-        <p:nvSpPr>
-          <p:cNvPr id="61441" name="Rectangle 2"/>
-          <p:cNvSpPr>
-            <a:spLocks noGrp="1" noChangeArrowheads="1"/>
-          </p:cNvSpPr>
-          <p:nvPr>
-            <p:ph type="hdr" sz="quarter"/>
-          </p:nvPr>
-        </p:nvSpPr>
-        <p:spPr bwMode="auto">
-          <a:noFill/>
-          <a:extLst>
-            <a:ext uri="{909E8E84-426E-40DD-AFC4-6F175D3DCCD1}">
-              <a14:hiddenFill xmlns:a14="http://schemas.microsoft.com/office/drawing/2010/main">
-                <a:solidFill>
-                  <a:srgbClr val="FFFFFF"/>
-                </a:solidFill>
-              </a14:hiddenFill>
-            </a:ext>
-            <a:ext uri="{91240B29-F687-4F45-9708-019B960494DF}">
-              <a14:hiddenLine xmlns:a14="http://schemas.microsoft.com/office/drawing/2010/main" w="9525">
-                <a:solidFill>
-                  <a:srgbClr val="000000"/>
-                </a:solidFill>
-                <a:miter lim="800000"/>
-                <a:headEnd/>
-                <a:tailEnd/>
-              </a14:hiddenLine>
-            </a:ext>
-          </a:extLst>
-        </p:spPr>
-        <p:txBody>
-          <a:bodyPr wrap="square" numCol="1" anchor="t" anchorCtr="0" compatLnSpc="1">
-            <a:prstTxWarp prst="textNoShape">
-              <a:avLst/>
-            </a:prstTxWarp>
-          </a:bodyPr>
-          <a:lstStyle>
-            <a:lvl1pPr>
-              <a:defRPr>
-                <a:solidFill>
-                  <a:schemeClr val="tx1"/>
-                </a:solidFill>
-                <a:latin typeface="Calibri" pitchFamily="34" charset="0"/>
-                <a:ea typeface="MS PGothic" pitchFamily="34" charset="-128"/>
-              </a:defRPr>
-            </a:lvl1pPr>
-            <a:lvl2pPr marL="742950" indent="-285750">
-              <a:defRPr>
-                <a:solidFill>
-                  <a:schemeClr val="tx1"/>
-                </a:solidFill>
-                <a:latin typeface="Calibri" pitchFamily="34" charset="0"/>
-                <a:ea typeface="MS PGothic" pitchFamily="34" charset="-128"/>
-              </a:defRPr>
-            </a:lvl2pPr>
-            <a:lvl3pPr marL="1143000" indent="-228600">
-              <a:defRPr>
-                <a:solidFill>
-                  <a:schemeClr val="tx1"/>
-                </a:solidFill>
-                <a:latin typeface="Calibri" pitchFamily="34" charset="0"/>
-                <a:ea typeface="MS PGothic" pitchFamily="34" charset="-128"/>
-              </a:defRPr>
-            </a:lvl3pPr>
-            <a:lvl4pPr marL="1600200" indent="-228600">
-              <a:defRPr>
-                <a:solidFill>
-                  <a:schemeClr val="tx1"/>
-                </a:solidFill>
-                <a:latin typeface="Calibri" pitchFamily="34" charset="0"/>
-                <a:ea typeface="MS PGothic" pitchFamily="34" charset="-128"/>
-              </a:defRPr>
-            </a:lvl4pPr>
-            <a:lvl5pPr marL="2057400" indent="-228600">
-              <a:defRPr>
-                <a:solidFill>
-                  <a:schemeClr val="tx1"/>
-                </a:solidFill>
-                <a:latin typeface="Calibri" pitchFamily="34" charset="0"/>
-                <a:ea typeface="MS PGothic" pitchFamily="34" charset="-128"/>
-              </a:defRPr>
-            </a:lvl5pPr>
-            <a:lvl6pPr marL="2514600" indent="-228600" fontAlgn="base">
-              <a:spcBef>
-                <a:spcPct val="0"/>
-              </a:spcBef>
-              <a:spcAft>
-                <a:spcPct val="0"/>
-              </a:spcAft>
-              <a:defRPr>
-                <a:solidFill>
-                  <a:schemeClr val="tx1"/>
-                </a:solidFill>
-                <a:latin typeface="Calibri" pitchFamily="34" charset="0"/>
-                <a:ea typeface="MS PGothic" pitchFamily="34" charset="-128"/>
-              </a:defRPr>
-            </a:lvl6pPr>
-            <a:lvl7pPr marL="2971800" indent="-228600" fontAlgn="base">
-              <a:spcBef>
-                <a:spcPct val="0"/>
-              </a:spcBef>
-              <a:spcAft>
-                <a:spcPct val="0"/>
-              </a:spcAft>
-              <a:defRPr>
-                <a:solidFill>
-                  <a:schemeClr val="tx1"/>
-                </a:solidFill>
-                <a:latin typeface="Calibri" pitchFamily="34" charset="0"/>
-                <a:ea typeface="MS PGothic" pitchFamily="34" charset="-128"/>
-              </a:defRPr>
-            </a:lvl7pPr>
-            <a:lvl8pPr marL="3429000" indent="-228600" fontAlgn="base">
-              <a:spcBef>
-                <a:spcPct val="0"/>
-              </a:spcBef>
-              <a:spcAft>
-                <a:spcPct val="0"/>
-              </a:spcAft>
-              <a:defRPr>
-                <a:solidFill>
-                  <a:schemeClr val="tx1"/>
-                </a:solidFill>
-                <a:latin typeface="Calibri" pitchFamily="34" charset="0"/>
-                <a:ea typeface="MS PGothic" pitchFamily="34" charset="-128"/>
-              </a:defRPr>
-            </a:lvl8pPr>
-            <a:lvl9pPr marL="3886200" indent="-228600" fontAlgn="base">
-              <a:spcBef>
-                <a:spcPct val="0"/>
-              </a:spcBef>
-              <a:spcAft>
-                <a:spcPct val="0"/>
-              </a:spcAft>
-              <a:defRPr>
-                <a:solidFill>
-                  <a:schemeClr val="tx1"/>
-                </a:solidFill>
-                <a:latin typeface="Calibri" pitchFamily="34" charset="0"/>
-                <a:ea typeface="MS PGothic" pitchFamily="34" charset="-128"/>
-              </a:defRPr>
-            </a:lvl9pPr>
-          </a:lstStyle>
-          <a:p>
-            <a:pPr fontAlgn="base">
-              <a:spcBef>
-                <a:spcPct val="0"/>
-              </a:spcBef>
-              <a:spcAft>
-                <a:spcPct val="0"/>
-              </a:spcAft>
-            </a:pPr>
-            <a:r>
-              <a:rPr lang="en-GB" altLang="en-US"/>
-              <a:t>Objects First with Java</a:t>
-            </a:r>
-          </a:p>
-        </p:txBody>
-      </p:sp>
-      <p:sp>
-        <p:nvSpPr>
-          <p:cNvPr id="61442" name="Rectangle 6"/>
-          <p:cNvSpPr>
-            <a:spLocks noGrp="1" noChangeArrowheads="1"/>
-          </p:cNvSpPr>
-          <p:nvPr>
-            <p:ph type="ftr" sz="quarter" idx="4"/>
-          </p:nvPr>
-        </p:nvSpPr>
-        <p:spPr bwMode="auto">
-          <a:noFill/>
-          <a:extLst>
-            <a:ext uri="{909E8E84-426E-40DD-AFC4-6F175D3DCCD1}">
-              <a14:hiddenFill xmlns:a14="http://schemas.microsoft.com/office/drawing/2010/main">
-                <a:solidFill>
-                  <a:srgbClr val="FFFFFF"/>
-                </a:solidFill>
-              </a14:hiddenFill>
-            </a:ext>
-            <a:ext uri="{91240B29-F687-4F45-9708-019B960494DF}">
-              <a14:hiddenLine xmlns:a14="http://schemas.microsoft.com/office/drawing/2010/main" w="9525">
-                <a:solidFill>
-                  <a:srgbClr val="000000"/>
-                </a:solidFill>
-                <a:miter lim="800000"/>
-                <a:headEnd/>
-                <a:tailEnd/>
-              </a14:hiddenLine>
-            </a:ext>
-          </a:extLst>
-        </p:spPr>
-        <p:txBody>
-          <a:bodyPr wrap="square" numCol="1" anchorCtr="0" compatLnSpc="1">
-            <a:prstTxWarp prst="textNoShape">
-              <a:avLst/>
-            </a:prstTxWarp>
-          </a:bodyPr>
-          <a:lstStyle>
-            <a:lvl1pPr>
-              <a:defRPr>
-                <a:solidFill>
-                  <a:schemeClr val="tx1"/>
-                </a:solidFill>
-                <a:latin typeface="Calibri" pitchFamily="34" charset="0"/>
-                <a:ea typeface="MS PGothic" pitchFamily="34" charset="-128"/>
-              </a:defRPr>
-            </a:lvl1pPr>
-            <a:lvl2pPr marL="742950" indent="-285750">
-              <a:defRPr>
-                <a:solidFill>
-                  <a:schemeClr val="tx1"/>
-                </a:solidFill>
-                <a:latin typeface="Calibri" pitchFamily="34" charset="0"/>
-                <a:ea typeface="MS PGothic" pitchFamily="34" charset="-128"/>
-              </a:defRPr>
-            </a:lvl2pPr>
-            <a:lvl3pPr marL="1143000" indent="-228600">
-              <a:defRPr>
-                <a:solidFill>
-                  <a:schemeClr val="tx1"/>
-                </a:solidFill>
-                <a:latin typeface="Calibri" pitchFamily="34" charset="0"/>
-                <a:ea typeface="MS PGothic" pitchFamily="34" charset="-128"/>
-              </a:defRPr>
-            </a:lvl3pPr>
-            <a:lvl4pPr marL="1600200" indent="-228600">
-              <a:defRPr>
-                <a:solidFill>
-                  <a:schemeClr val="tx1"/>
-                </a:solidFill>
-                <a:latin typeface="Calibri" pitchFamily="34" charset="0"/>
-                <a:ea typeface="MS PGothic" pitchFamily="34" charset="-128"/>
-              </a:defRPr>
-            </a:lvl4pPr>
-            <a:lvl5pPr marL="2057400" indent="-228600">
-              <a:defRPr>
-                <a:solidFill>
-                  <a:schemeClr val="tx1"/>
-                </a:solidFill>
-                <a:latin typeface="Calibri" pitchFamily="34" charset="0"/>
-                <a:ea typeface="MS PGothic" pitchFamily="34" charset="-128"/>
-              </a:defRPr>
-            </a:lvl5pPr>
-            <a:lvl6pPr marL="2514600" indent="-228600" fontAlgn="base">
-              <a:spcBef>
-                <a:spcPct val="0"/>
-              </a:spcBef>
-              <a:spcAft>
-                <a:spcPct val="0"/>
-              </a:spcAft>
-              <a:defRPr>
-                <a:solidFill>
-                  <a:schemeClr val="tx1"/>
-                </a:solidFill>
-                <a:latin typeface="Calibri" pitchFamily="34" charset="0"/>
-                <a:ea typeface="MS PGothic" pitchFamily="34" charset="-128"/>
-              </a:defRPr>
-            </a:lvl6pPr>
-            <a:lvl7pPr marL="2971800" indent="-228600" fontAlgn="base">
-              <a:spcBef>
-                <a:spcPct val="0"/>
-              </a:spcBef>
-              <a:spcAft>
-                <a:spcPct val="0"/>
-              </a:spcAft>
-              <a:defRPr>
-                <a:solidFill>
-                  <a:schemeClr val="tx1"/>
-                </a:solidFill>
-                <a:latin typeface="Calibri" pitchFamily="34" charset="0"/>
-                <a:ea typeface="MS PGothic" pitchFamily="34" charset="-128"/>
-              </a:defRPr>
-            </a:lvl7pPr>
-            <a:lvl8pPr marL="3429000" indent="-228600" fontAlgn="base">
-              <a:spcBef>
-                <a:spcPct val="0"/>
-              </a:spcBef>
-              <a:spcAft>
-                <a:spcPct val="0"/>
-              </a:spcAft>
-              <a:defRPr>
-                <a:solidFill>
-                  <a:schemeClr val="tx1"/>
-                </a:solidFill>
-                <a:latin typeface="Calibri" pitchFamily="34" charset="0"/>
-                <a:ea typeface="MS PGothic" pitchFamily="34" charset="-128"/>
-              </a:defRPr>
-            </a:lvl8pPr>
-            <a:lvl9pPr marL="3886200" indent="-228600" fontAlgn="base">
-              <a:spcBef>
-                <a:spcPct val="0"/>
-              </a:spcBef>
-              <a:spcAft>
-                <a:spcPct val="0"/>
-              </a:spcAft>
-              <a:defRPr>
-                <a:solidFill>
-                  <a:schemeClr val="tx1"/>
-                </a:solidFill>
-                <a:latin typeface="Calibri" pitchFamily="34" charset="0"/>
-                <a:ea typeface="MS PGothic" pitchFamily="34" charset="-128"/>
-              </a:defRPr>
-            </a:lvl9pPr>
-          </a:lstStyle>
-          <a:p>
-            <a:pPr fontAlgn="base">
-              <a:spcBef>
-                <a:spcPct val="0"/>
-              </a:spcBef>
-              <a:spcAft>
-                <a:spcPct val="0"/>
-              </a:spcAft>
-            </a:pPr>
-            <a:r>
-              <a:rPr lang="en-GB" altLang="en-US"/>
-              <a:t>© David J. Barnes and Michael Kölling</a:t>
-            </a:r>
-          </a:p>
-        </p:txBody>
-      </p:sp>
-      <p:sp>
-        <p:nvSpPr>
-          <p:cNvPr id="61443" name="Rectangle 7"/>
-          <p:cNvSpPr>
-            <a:spLocks noGrp="1" noChangeArrowheads="1"/>
-          </p:cNvSpPr>
-          <p:nvPr>
-            <p:ph type="sldNum" sz="quarter" idx="5"/>
-          </p:nvPr>
-        </p:nvSpPr>
-        <p:spPr bwMode="auto">
-          <a:noFill/>
-          <a:extLst>
-            <a:ext uri="{909E8E84-426E-40DD-AFC4-6F175D3DCCD1}">
-              <a14:hiddenFill xmlns:a14="http://schemas.microsoft.com/office/drawing/2010/main">
-                <a:solidFill>
-                  <a:srgbClr val="FFFFFF"/>
-                </a:solidFill>
-              </a14:hiddenFill>
-            </a:ext>
-            <a:ext uri="{91240B29-F687-4F45-9708-019B960494DF}">
-              <a14:hiddenLine xmlns:a14="http://schemas.microsoft.com/office/drawing/2010/main" w="9525">
-                <a:solidFill>
-                  <a:srgbClr val="000000"/>
-                </a:solidFill>
-                <a:miter lim="800000"/>
-                <a:headEnd/>
-                <a:tailEnd/>
-              </a14:hiddenLine>
-            </a:ext>
-          </a:extLst>
-        </p:spPr>
-        <p:txBody>
-          <a:bodyPr/>
-          <a:lstStyle>
-            <a:lvl1pPr>
-              <a:defRPr>
-                <a:solidFill>
-                  <a:schemeClr val="tx1"/>
-                </a:solidFill>
-                <a:latin typeface="Calibri" pitchFamily="34" charset="0"/>
-                <a:ea typeface="MS PGothic" pitchFamily="34" charset="-128"/>
-              </a:defRPr>
-            </a:lvl1pPr>
-            <a:lvl2pPr marL="742950" indent="-285750">
-              <a:defRPr>
-                <a:solidFill>
-                  <a:schemeClr val="tx1"/>
-                </a:solidFill>
-                <a:latin typeface="Calibri" pitchFamily="34" charset="0"/>
-                <a:ea typeface="MS PGothic" pitchFamily="34" charset="-128"/>
-              </a:defRPr>
-            </a:lvl2pPr>
-            <a:lvl3pPr marL="1143000" indent="-228600">
-              <a:defRPr>
-                <a:solidFill>
-                  <a:schemeClr val="tx1"/>
-                </a:solidFill>
-                <a:latin typeface="Calibri" pitchFamily="34" charset="0"/>
-                <a:ea typeface="MS PGothic" pitchFamily="34" charset="-128"/>
-              </a:defRPr>
-            </a:lvl3pPr>
-            <a:lvl4pPr marL="1600200" indent="-228600">
-              <a:defRPr>
-                <a:solidFill>
-                  <a:schemeClr val="tx1"/>
-                </a:solidFill>
-                <a:latin typeface="Calibri" pitchFamily="34" charset="0"/>
-                <a:ea typeface="MS PGothic" pitchFamily="34" charset="-128"/>
-              </a:defRPr>
-            </a:lvl4pPr>
-            <a:lvl5pPr marL="2057400" indent="-228600">
-              <a:defRPr>
-                <a:solidFill>
-                  <a:schemeClr val="tx1"/>
-                </a:solidFill>
-                <a:latin typeface="Calibri" pitchFamily="34" charset="0"/>
-                <a:ea typeface="MS PGothic" pitchFamily="34" charset="-128"/>
-              </a:defRPr>
-            </a:lvl5pPr>
-            <a:lvl6pPr marL="2514600" indent="-228600" fontAlgn="base">
-              <a:spcBef>
-                <a:spcPct val="0"/>
-              </a:spcBef>
-              <a:spcAft>
-                <a:spcPct val="0"/>
-              </a:spcAft>
-              <a:defRPr>
-                <a:solidFill>
-                  <a:schemeClr val="tx1"/>
-                </a:solidFill>
-                <a:latin typeface="Calibri" pitchFamily="34" charset="0"/>
-                <a:ea typeface="MS PGothic" pitchFamily="34" charset="-128"/>
-              </a:defRPr>
-            </a:lvl6pPr>
-            <a:lvl7pPr marL="2971800" indent="-228600" fontAlgn="base">
-              <a:spcBef>
-                <a:spcPct val="0"/>
-              </a:spcBef>
-              <a:spcAft>
-                <a:spcPct val="0"/>
-              </a:spcAft>
-              <a:defRPr>
-                <a:solidFill>
-                  <a:schemeClr val="tx1"/>
-                </a:solidFill>
-                <a:latin typeface="Calibri" pitchFamily="34" charset="0"/>
-                <a:ea typeface="MS PGothic" pitchFamily="34" charset="-128"/>
-              </a:defRPr>
-            </a:lvl7pPr>
-            <a:lvl8pPr marL="3429000" indent="-228600" fontAlgn="base">
-              <a:spcBef>
-                <a:spcPct val="0"/>
-              </a:spcBef>
-              <a:spcAft>
-                <a:spcPct val="0"/>
-              </a:spcAft>
-              <a:defRPr>
-                <a:solidFill>
-                  <a:schemeClr val="tx1"/>
-                </a:solidFill>
-                <a:latin typeface="Calibri" pitchFamily="34" charset="0"/>
-                <a:ea typeface="MS PGothic" pitchFamily="34" charset="-128"/>
-              </a:defRPr>
-            </a:lvl8pPr>
-            <a:lvl9pPr marL="3886200" indent="-228600" fontAlgn="base">
-              <a:spcBef>
-                <a:spcPct val="0"/>
-              </a:spcBef>
-              <a:spcAft>
-                <a:spcPct val="0"/>
-              </a:spcAft>
-              <a:defRPr>
-                <a:solidFill>
-                  <a:schemeClr val="tx1"/>
-                </a:solidFill>
-                <a:latin typeface="Calibri" pitchFamily="34" charset="0"/>
-                <a:ea typeface="MS PGothic" pitchFamily="34" charset="-128"/>
-              </a:defRPr>
-            </a:lvl9pPr>
-          </a:lstStyle>
-          <a:p>
-            <a:fld id="{96C53C0E-6DE2-48FF-AFC8-5B6F7D1351EB}" type="slidenum">
-              <a:rPr lang="en-GB" altLang="en-US"/>
-              <a:pPr/>
-              <a:t>11</a:t>
-            </a:fld>
-            <a:endParaRPr lang="en-GB" altLang="en-US"/>
-          </a:p>
-        </p:txBody>
-      </p:sp>
-      <p:sp>
-        <p:nvSpPr>
-          <p:cNvPr id="61444" name="Rectangle 2"/>
-          <p:cNvSpPr>
-            <a:spLocks noGrp="1" noRot="1" noChangeAspect="1" noChangeArrowheads="1" noTextEdit="1"/>
-          </p:cNvSpPr>
-          <p:nvPr>
-            <p:ph type="sldImg"/>
-          </p:nvPr>
-        </p:nvSpPr>
-        <p:spPr bwMode="auto">
-          <a:noFill/>
-          <a:ln>
-            <a:solidFill>
-              <a:srgbClr val="000000"/>
-            </a:solidFill>
-            <a:miter lim="800000"/>
-            <a:headEnd/>
-            <a:tailEnd/>
-          </a:ln>
-          <a:extLst>
-            <a:ext uri="{909E8E84-426E-40DD-AFC4-6F175D3DCCD1}">
-              <a14:hiddenFill xmlns:a14="http://schemas.microsoft.com/office/drawing/2010/main">
-                <a:solidFill>
-                  <a:srgbClr val="FFFFFF"/>
-                </a:solidFill>
-              </a14:hiddenFill>
-            </a:ext>
-          </a:extLst>
-        </p:spPr>
-      </p:sp>
-      <p:sp>
-        <p:nvSpPr>
-          <p:cNvPr id="61445" name="Rectangle 3"/>
-          <p:cNvSpPr>
-            <a:spLocks noGrp="1" noChangeArrowheads="1"/>
-          </p:cNvSpPr>
-          <p:nvPr>
-            <p:ph type="body" idx="1"/>
-          </p:nvPr>
-        </p:nvSpPr>
-        <p:spPr bwMode="auto">
-          <a:noFill/>
-          <a:extLst>
-            <a:ext uri="{909E8E84-426E-40DD-AFC4-6F175D3DCCD1}">
-              <a14:hiddenFill xmlns:a14="http://schemas.microsoft.com/office/drawing/2010/main">
-                <a:solidFill>
-                  <a:srgbClr val="FFFFFF"/>
-                </a:solidFill>
-              </a14:hiddenFill>
-            </a:ext>
-            <a:ext uri="{91240B29-F687-4F45-9708-019B960494DF}">
-              <a14:hiddenLine xmlns:a14="http://schemas.microsoft.com/office/drawing/2010/main" w="9525">
-                <a:solidFill>
-                  <a:srgbClr val="000000"/>
-                </a:solidFill>
-                <a:miter lim="800000"/>
-                <a:headEnd/>
-                <a:tailEnd/>
-              </a14:hiddenLine>
-            </a:ext>
-          </a:extLst>
-        </p:spPr>
-        <p:txBody>
-          <a:bodyPr wrap="square" numCol="1" anchor="t" anchorCtr="0" compatLnSpc="1">
-            <a:prstTxWarp prst="textNoShape">
-              <a:avLst/>
-            </a:prstTxWarp>
-          </a:bodyPr>
-          <a:lstStyle/>
-          <a:p>
-            <a:pPr>
-              <a:spcBef>
-                <a:spcPct val="0"/>
-              </a:spcBef>
-            </a:pPr>
-            <a:r>
-              <a:rPr lang="en-US" altLang="en-US" dirty="0"/>
-              <a:t>The “update the LCV” should always update it so that the Boolean condition will eventually evaluation to false. </a:t>
-            </a:r>
-          </a:p>
-        </p:txBody>
-      </p:sp>
-    </p:spTree>
-    <p:extLst>
-      <p:ext uri="{BB962C8B-B14F-4D97-AF65-F5344CB8AC3E}">
-        <p14:creationId xmlns:p14="http://schemas.microsoft.com/office/powerpoint/2010/main" val="3967997845"/>
       </p:ext>
     </p:extLst>
   </p:cSld>
@@ -3684,10 +4132,738 @@
           <a:bodyPr/>
           <a:lstStyle/>
           <a:p>
+            <a:fld id="{08D00790-568A-44AB-A948-643E31985A48}" type="slidenum">
+              <a:rPr lang="en-GB"/>
+              <a:pPr/>
+              <a:t>12</a:t>
+            </a:fld>
+            <a:endParaRPr lang="en-GB"/>
+          </a:p>
+        </p:txBody>
+      </p:sp>
+      <p:sp>
+        <p:nvSpPr>
+          <p:cNvPr id="140290" name="Rectangle 2"/>
+          <p:cNvSpPr>
+            <a:spLocks noGrp="1" noRot="1" noChangeAspect="1" noChangeArrowheads="1" noTextEdit="1"/>
+          </p:cNvSpPr>
+          <p:nvPr>
+            <p:ph type="sldImg"/>
+          </p:nvPr>
+        </p:nvSpPr>
+        <p:spPr>
+          <a:ln/>
+        </p:spPr>
+      </p:sp>
+      <p:sp>
+        <p:nvSpPr>
+          <p:cNvPr id="140291" name="Rectangle 3"/>
+          <p:cNvSpPr>
+            <a:spLocks noGrp="1" noChangeArrowheads="1"/>
+          </p:cNvSpPr>
+          <p:nvPr>
+            <p:ph type="body" idx="1"/>
+          </p:nvPr>
+        </p:nvSpPr>
+        <p:spPr>
+          <a:xfrm>
+            <a:off x="914400" y="4343400"/>
+            <a:ext cx="1195388" cy="274638"/>
+          </a:xfrm>
+        </p:spPr>
+        <p:txBody>
+          <a:bodyPr/>
+          <a:lstStyle/>
+          <a:p>
+            <a:endParaRPr lang="en-US" dirty="0"/>
+          </a:p>
+        </p:txBody>
+      </p:sp>
+    </p:spTree>
+    <p:extLst>
+      <p:ext uri="{BB962C8B-B14F-4D97-AF65-F5344CB8AC3E}">
+        <p14:creationId xmlns:p14="http://schemas.microsoft.com/office/powerpoint/2010/main" val="610162622"/>
+      </p:ext>
+    </p:extLst>
+  </p:cSld>
+  <p:clrMapOvr>
+    <a:masterClrMapping/>
+  </p:clrMapOvr>
+</p:notes>
+</file>
+
+<file path=ppt/notesSlides/notesSlide8.xml><?xml version="1.0" encoding="utf-8"?>
+<p:notes xmlns:a="http://schemas.openxmlformats.org/drawingml/2006/main" xmlns:r="http://schemas.openxmlformats.org/officeDocument/2006/relationships" xmlns:p="http://schemas.openxmlformats.org/presentationml/2006/main">
+  <p:cSld>
+    <p:spTree>
+      <p:nvGrpSpPr>
+        <p:cNvPr id="1" name=""/>
+        <p:cNvGrpSpPr/>
+        <p:nvPr/>
+      </p:nvGrpSpPr>
+      <p:grpSpPr>
+        <a:xfrm>
+          <a:off x="0" y="0"/>
+          <a:ext cx="0" cy="0"/>
+          <a:chOff x="0" y="0"/>
+          <a:chExt cx="0" cy="0"/>
+        </a:xfrm>
+      </p:grpSpPr>
+      <p:sp>
+        <p:nvSpPr>
+          <p:cNvPr id="61441" name="Rectangle 2"/>
+          <p:cNvSpPr>
+            <a:spLocks noGrp="1" noChangeArrowheads="1"/>
+          </p:cNvSpPr>
+          <p:nvPr>
+            <p:ph type="hdr" sz="quarter"/>
+          </p:nvPr>
+        </p:nvSpPr>
+        <p:spPr bwMode="auto">
+          <a:noFill/>
+          <a:extLst>
+            <a:ext uri="{909E8E84-426E-40DD-AFC4-6F175D3DCCD1}">
+              <a14:hiddenFill xmlns:a14="http://schemas.microsoft.com/office/drawing/2010/main">
+                <a:solidFill>
+                  <a:srgbClr val="FFFFFF"/>
+                </a:solidFill>
+              </a14:hiddenFill>
+            </a:ext>
+            <a:ext uri="{91240B29-F687-4F45-9708-019B960494DF}">
+              <a14:hiddenLine xmlns:a14="http://schemas.microsoft.com/office/drawing/2010/main" w="9525">
+                <a:solidFill>
+                  <a:srgbClr val="000000"/>
+                </a:solidFill>
+                <a:miter lim="800000"/>
+                <a:headEnd/>
+                <a:tailEnd/>
+              </a14:hiddenLine>
+            </a:ext>
+          </a:extLst>
+        </p:spPr>
+        <p:txBody>
+          <a:bodyPr wrap="square" numCol="1" anchor="t" anchorCtr="0" compatLnSpc="1">
+            <a:prstTxWarp prst="textNoShape">
+              <a:avLst/>
+            </a:prstTxWarp>
+          </a:bodyPr>
+          <a:lstStyle>
+            <a:lvl1pPr>
+              <a:defRPr>
+                <a:solidFill>
+                  <a:schemeClr val="tx1"/>
+                </a:solidFill>
+                <a:latin typeface="Calibri" pitchFamily="34" charset="0"/>
+                <a:ea typeface="MS PGothic" pitchFamily="34" charset="-128"/>
+              </a:defRPr>
+            </a:lvl1pPr>
+            <a:lvl2pPr marL="742950" indent="-285750">
+              <a:defRPr>
+                <a:solidFill>
+                  <a:schemeClr val="tx1"/>
+                </a:solidFill>
+                <a:latin typeface="Calibri" pitchFamily="34" charset="0"/>
+                <a:ea typeface="MS PGothic" pitchFamily="34" charset="-128"/>
+              </a:defRPr>
+            </a:lvl2pPr>
+            <a:lvl3pPr marL="1143000" indent="-228600">
+              <a:defRPr>
+                <a:solidFill>
+                  <a:schemeClr val="tx1"/>
+                </a:solidFill>
+                <a:latin typeface="Calibri" pitchFamily="34" charset="0"/>
+                <a:ea typeface="MS PGothic" pitchFamily="34" charset="-128"/>
+              </a:defRPr>
+            </a:lvl3pPr>
+            <a:lvl4pPr marL="1600200" indent="-228600">
+              <a:defRPr>
+                <a:solidFill>
+                  <a:schemeClr val="tx1"/>
+                </a:solidFill>
+                <a:latin typeface="Calibri" pitchFamily="34" charset="0"/>
+                <a:ea typeface="MS PGothic" pitchFamily="34" charset="-128"/>
+              </a:defRPr>
+            </a:lvl4pPr>
+            <a:lvl5pPr marL="2057400" indent="-228600">
+              <a:defRPr>
+                <a:solidFill>
+                  <a:schemeClr val="tx1"/>
+                </a:solidFill>
+                <a:latin typeface="Calibri" pitchFamily="34" charset="0"/>
+                <a:ea typeface="MS PGothic" pitchFamily="34" charset="-128"/>
+              </a:defRPr>
+            </a:lvl5pPr>
+            <a:lvl6pPr marL="2514600" indent="-228600" fontAlgn="base">
+              <a:spcBef>
+                <a:spcPct val="0"/>
+              </a:spcBef>
+              <a:spcAft>
+                <a:spcPct val="0"/>
+              </a:spcAft>
+              <a:defRPr>
+                <a:solidFill>
+                  <a:schemeClr val="tx1"/>
+                </a:solidFill>
+                <a:latin typeface="Calibri" pitchFamily="34" charset="0"/>
+                <a:ea typeface="MS PGothic" pitchFamily="34" charset="-128"/>
+              </a:defRPr>
+            </a:lvl6pPr>
+            <a:lvl7pPr marL="2971800" indent="-228600" fontAlgn="base">
+              <a:spcBef>
+                <a:spcPct val="0"/>
+              </a:spcBef>
+              <a:spcAft>
+                <a:spcPct val="0"/>
+              </a:spcAft>
+              <a:defRPr>
+                <a:solidFill>
+                  <a:schemeClr val="tx1"/>
+                </a:solidFill>
+                <a:latin typeface="Calibri" pitchFamily="34" charset="0"/>
+                <a:ea typeface="MS PGothic" pitchFamily="34" charset="-128"/>
+              </a:defRPr>
+            </a:lvl7pPr>
+            <a:lvl8pPr marL="3429000" indent="-228600" fontAlgn="base">
+              <a:spcBef>
+                <a:spcPct val="0"/>
+              </a:spcBef>
+              <a:spcAft>
+                <a:spcPct val="0"/>
+              </a:spcAft>
+              <a:defRPr>
+                <a:solidFill>
+                  <a:schemeClr val="tx1"/>
+                </a:solidFill>
+                <a:latin typeface="Calibri" pitchFamily="34" charset="0"/>
+                <a:ea typeface="MS PGothic" pitchFamily="34" charset="-128"/>
+              </a:defRPr>
+            </a:lvl8pPr>
+            <a:lvl9pPr marL="3886200" indent="-228600" fontAlgn="base">
+              <a:spcBef>
+                <a:spcPct val="0"/>
+              </a:spcBef>
+              <a:spcAft>
+                <a:spcPct val="0"/>
+              </a:spcAft>
+              <a:defRPr>
+                <a:solidFill>
+                  <a:schemeClr val="tx1"/>
+                </a:solidFill>
+                <a:latin typeface="Calibri" pitchFamily="34" charset="0"/>
+                <a:ea typeface="MS PGothic" pitchFamily="34" charset="-128"/>
+              </a:defRPr>
+            </a:lvl9pPr>
+          </a:lstStyle>
+          <a:p>
+            <a:pPr fontAlgn="base">
+              <a:spcBef>
+                <a:spcPct val="0"/>
+              </a:spcBef>
+              <a:spcAft>
+                <a:spcPct val="0"/>
+              </a:spcAft>
+            </a:pPr>
+            <a:r>
+              <a:rPr lang="en-GB" altLang="en-US"/>
+              <a:t>Objects First with Java</a:t>
+            </a:r>
+          </a:p>
+        </p:txBody>
+      </p:sp>
+      <p:sp>
+        <p:nvSpPr>
+          <p:cNvPr id="61442" name="Rectangle 6"/>
+          <p:cNvSpPr>
+            <a:spLocks noGrp="1" noChangeArrowheads="1"/>
+          </p:cNvSpPr>
+          <p:nvPr>
+            <p:ph type="ftr" sz="quarter" idx="4"/>
+          </p:nvPr>
+        </p:nvSpPr>
+        <p:spPr bwMode="auto">
+          <a:noFill/>
+          <a:extLst>
+            <a:ext uri="{909E8E84-426E-40DD-AFC4-6F175D3DCCD1}">
+              <a14:hiddenFill xmlns:a14="http://schemas.microsoft.com/office/drawing/2010/main">
+                <a:solidFill>
+                  <a:srgbClr val="FFFFFF"/>
+                </a:solidFill>
+              </a14:hiddenFill>
+            </a:ext>
+            <a:ext uri="{91240B29-F687-4F45-9708-019B960494DF}">
+              <a14:hiddenLine xmlns:a14="http://schemas.microsoft.com/office/drawing/2010/main" w="9525">
+                <a:solidFill>
+                  <a:srgbClr val="000000"/>
+                </a:solidFill>
+                <a:miter lim="800000"/>
+                <a:headEnd/>
+                <a:tailEnd/>
+              </a14:hiddenLine>
+            </a:ext>
+          </a:extLst>
+        </p:spPr>
+        <p:txBody>
+          <a:bodyPr wrap="square" numCol="1" anchorCtr="0" compatLnSpc="1">
+            <a:prstTxWarp prst="textNoShape">
+              <a:avLst/>
+            </a:prstTxWarp>
+          </a:bodyPr>
+          <a:lstStyle>
+            <a:lvl1pPr>
+              <a:defRPr>
+                <a:solidFill>
+                  <a:schemeClr val="tx1"/>
+                </a:solidFill>
+                <a:latin typeface="Calibri" pitchFamily="34" charset="0"/>
+                <a:ea typeface="MS PGothic" pitchFamily="34" charset="-128"/>
+              </a:defRPr>
+            </a:lvl1pPr>
+            <a:lvl2pPr marL="742950" indent="-285750">
+              <a:defRPr>
+                <a:solidFill>
+                  <a:schemeClr val="tx1"/>
+                </a:solidFill>
+                <a:latin typeface="Calibri" pitchFamily="34" charset="0"/>
+                <a:ea typeface="MS PGothic" pitchFamily="34" charset="-128"/>
+              </a:defRPr>
+            </a:lvl2pPr>
+            <a:lvl3pPr marL="1143000" indent="-228600">
+              <a:defRPr>
+                <a:solidFill>
+                  <a:schemeClr val="tx1"/>
+                </a:solidFill>
+                <a:latin typeface="Calibri" pitchFamily="34" charset="0"/>
+                <a:ea typeface="MS PGothic" pitchFamily="34" charset="-128"/>
+              </a:defRPr>
+            </a:lvl3pPr>
+            <a:lvl4pPr marL="1600200" indent="-228600">
+              <a:defRPr>
+                <a:solidFill>
+                  <a:schemeClr val="tx1"/>
+                </a:solidFill>
+                <a:latin typeface="Calibri" pitchFamily="34" charset="0"/>
+                <a:ea typeface="MS PGothic" pitchFamily="34" charset="-128"/>
+              </a:defRPr>
+            </a:lvl4pPr>
+            <a:lvl5pPr marL="2057400" indent="-228600">
+              <a:defRPr>
+                <a:solidFill>
+                  <a:schemeClr val="tx1"/>
+                </a:solidFill>
+                <a:latin typeface="Calibri" pitchFamily="34" charset="0"/>
+                <a:ea typeface="MS PGothic" pitchFamily="34" charset="-128"/>
+              </a:defRPr>
+            </a:lvl5pPr>
+            <a:lvl6pPr marL="2514600" indent="-228600" fontAlgn="base">
+              <a:spcBef>
+                <a:spcPct val="0"/>
+              </a:spcBef>
+              <a:spcAft>
+                <a:spcPct val="0"/>
+              </a:spcAft>
+              <a:defRPr>
+                <a:solidFill>
+                  <a:schemeClr val="tx1"/>
+                </a:solidFill>
+                <a:latin typeface="Calibri" pitchFamily="34" charset="0"/>
+                <a:ea typeface="MS PGothic" pitchFamily="34" charset="-128"/>
+              </a:defRPr>
+            </a:lvl6pPr>
+            <a:lvl7pPr marL="2971800" indent="-228600" fontAlgn="base">
+              <a:spcBef>
+                <a:spcPct val="0"/>
+              </a:spcBef>
+              <a:spcAft>
+                <a:spcPct val="0"/>
+              </a:spcAft>
+              <a:defRPr>
+                <a:solidFill>
+                  <a:schemeClr val="tx1"/>
+                </a:solidFill>
+                <a:latin typeface="Calibri" pitchFamily="34" charset="0"/>
+                <a:ea typeface="MS PGothic" pitchFamily="34" charset="-128"/>
+              </a:defRPr>
+            </a:lvl7pPr>
+            <a:lvl8pPr marL="3429000" indent="-228600" fontAlgn="base">
+              <a:spcBef>
+                <a:spcPct val="0"/>
+              </a:spcBef>
+              <a:spcAft>
+                <a:spcPct val="0"/>
+              </a:spcAft>
+              <a:defRPr>
+                <a:solidFill>
+                  <a:schemeClr val="tx1"/>
+                </a:solidFill>
+                <a:latin typeface="Calibri" pitchFamily="34" charset="0"/>
+                <a:ea typeface="MS PGothic" pitchFamily="34" charset="-128"/>
+              </a:defRPr>
+            </a:lvl8pPr>
+            <a:lvl9pPr marL="3886200" indent="-228600" fontAlgn="base">
+              <a:spcBef>
+                <a:spcPct val="0"/>
+              </a:spcBef>
+              <a:spcAft>
+                <a:spcPct val="0"/>
+              </a:spcAft>
+              <a:defRPr>
+                <a:solidFill>
+                  <a:schemeClr val="tx1"/>
+                </a:solidFill>
+                <a:latin typeface="Calibri" pitchFamily="34" charset="0"/>
+                <a:ea typeface="MS PGothic" pitchFamily="34" charset="-128"/>
+              </a:defRPr>
+            </a:lvl9pPr>
+          </a:lstStyle>
+          <a:p>
+            <a:pPr fontAlgn="base">
+              <a:spcBef>
+                <a:spcPct val="0"/>
+              </a:spcBef>
+              <a:spcAft>
+                <a:spcPct val="0"/>
+              </a:spcAft>
+            </a:pPr>
+            <a:r>
+              <a:rPr lang="en-GB" altLang="en-US"/>
+              <a:t>© David J. Barnes and Michael Kölling</a:t>
+            </a:r>
+          </a:p>
+        </p:txBody>
+      </p:sp>
+      <p:sp>
+        <p:nvSpPr>
+          <p:cNvPr id="61443" name="Rectangle 7"/>
+          <p:cNvSpPr>
+            <a:spLocks noGrp="1" noChangeArrowheads="1"/>
+          </p:cNvSpPr>
+          <p:nvPr>
+            <p:ph type="sldNum" sz="quarter" idx="5"/>
+          </p:nvPr>
+        </p:nvSpPr>
+        <p:spPr bwMode="auto">
+          <a:noFill/>
+          <a:extLst>
+            <a:ext uri="{909E8E84-426E-40DD-AFC4-6F175D3DCCD1}">
+              <a14:hiddenFill xmlns:a14="http://schemas.microsoft.com/office/drawing/2010/main">
+                <a:solidFill>
+                  <a:srgbClr val="FFFFFF"/>
+                </a:solidFill>
+              </a14:hiddenFill>
+            </a:ext>
+            <a:ext uri="{91240B29-F687-4F45-9708-019B960494DF}">
+              <a14:hiddenLine xmlns:a14="http://schemas.microsoft.com/office/drawing/2010/main" w="9525">
+                <a:solidFill>
+                  <a:srgbClr val="000000"/>
+                </a:solidFill>
+                <a:miter lim="800000"/>
+                <a:headEnd/>
+                <a:tailEnd/>
+              </a14:hiddenLine>
+            </a:ext>
+          </a:extLst>
+        </p:spPr>
+        <p:txBody>
+          <a:bodyPr/>
+          <a:lstStyle>
+            <a:lvl1pPr>
+              <a:defRPr>
+                <a:solidFill>
+                  <a:schemeClr val="tx1"/>
+                </a:solidFill>
+                <a:latin typeface="Calibri" pitchFamily="34" charset="0"/>
+                <a:ea typeface="MS PGothic" pitchFamily="34" charset="-128"/>
+              </a:defRPr>
+            </a:lvl1pPr>
+            <a:lvl2pPr marL="742950" indent="-285750">
+              <a:defRPr>
+                <a:solidFill>
+                  <a:schemeClr val="tx1"/>
+                </a:solidFill>
+                <a:latin typeface="Calibri" pitchFamily="34" charset="0"/>
+                <a:ea typeface="MS PGothic" pitchFamily="34" charset="-128"/>
+              </a:defRPr>
+            </a:lvl2pPr>
+            <a:lvl3pPr marL="1143000" indent="-228600">
+              <a:defRPr>
+                <a:solidFill>
+                  <a:schemeClr val="tx1"/>
+                </a:solidFill>
+                <a:latin typeface="Calibri" pitchFamily="34" charset="0"/>
+                <a:ea typeface="MS PGothic" pitchFamily="34" charset="-128"/>
+              </a:defRPr>
+            </a:lvl3pPr>
+            <a:lvl4pPr marL="1600200" indent="-228600">
+              <a:defRPr>
+                <a:solidFill>
+                  <a:schemeClr val="tx1"/>
+                </a:solidFill>
+                <a:latin typeface="Calibri" pitchFamily="34" charset="0"/>
+                <a:ea typeface="MS PGothic" pitchFamily="34" charset="-128"/>
+              </a:defRPr>
+            </a:lvl4pPr>
+            <a:lvl5pPr marL="2057400" indent="-228600">
+              <a:defRPr>
+                <a:solidFill>
+                  <a:schemeClr val="tx1"/>
+                </a:solidFill>
+                <a:latin typeface="Calibri" pitchFamily="34" charset="0"/>
+                <a:ea typeface="MS PGothic" pitchFamily="34" charset="-128"/>
+              </a:defRPr>
+            </a:lvl5pPr>
+            <a:lvl6pPr marL="2514600" indent="-228600" fontAlgn="base">
+              <a:spcBef>
+                <a:spcPct val="0"/>
+              </a:spcBef>
+              <a:spcAft>
+                <a:spcPct val="0"/>
+              </a:spcAft>
+              <a:defRPr>
+                <a:solidFill>
+                  <a:schemeClr val="tx1"/>
+                </a:solidFill>
+                <a:latin typeface="Calibri" pitchFamily="34" charset="0"/>
+                <a:ea typeface="MS PGothic" pitchFamily="34" charset="-128"/>
+              </a:defRPr>
+            </a:lvl6pPr>
+            <a:lvl7pPr marL="2971800" indent="-228600" fontAlgn="base">
+              <a:spcBef>
+                <a:spcPct val="0"/>
+              </a:spcBef>
+              <a:spcAft>
+                <a:spcPct val="0"/>
+              </a:spcAft>
+              <a:defRPr>
+                <a:solidFill>
+                  <a:schemeClr val="tx1"/>
+                </a:solidFill>
+                <a:latin typeface="Calibri" pitchFamily="34" charset="0"/>
+                <a:ea typeface="MS PGothic" pitchFamily="34" charset="-128"/>
+              </a:defRPr>
+            </a:lvl7pPr>
+            <a:lvl8pPr marL="3429000" indent="-228600" fontAlgn="base">
+              <a:spcBef>
+                <a:spcPct val="0"/>
+              </a:spcBef>
+              <a:spcAft>
+                <a:spcPct val="0"/>
+              </a:spcAft>
+              <a:defRPr>
+                <a:solidFill>
+                  <a:schemeClr val="tx1"/>
+                </a:solidFill>
+                <a:latin typeface="Calibri" pitchFamily="34" charset="0"/>
+                <a:ea typeface="MS PGothic" pitchFamily="34" charset="-128"/>
+              </a:defRPr>
+            </a:lvl8pPr>
+            <a:lvl9pPr marL="3886200" indent="-228600" fontAlgn="base">
+              <a:spcBef>
+                <a:spcPct val="0"/>
+              </a:spcBef>
+              <a:spcAft>
+                <a:spcPct val="0"/>
+              </a:spcAft>
+              <a:defRPr>
+                <a:solidFill>
+                  <a:schemeClr val="tx1"/>
+                </a:solidFill>
+                <a:latin typeface="Calibri" pitchFamily="34" charset="0"/>
+                <a:ea typeface="MS PGothic" pitchFamily="34" charset="-128"/>
+              </a:defRPr>
+            </a:lvl9pPr>
+          </a:lstStyle>
+          <a:p>
+            <a:fld id="{96C53C0E-6DE2-48FF-AFC8-5B6F7D1351EB}" type="slidenum">
+              <a:rPr lang="en-GB" altLang="en-US"/>
+              <a:pPr/>
+              <a:t>13</a:t>
+            </a:fld>
+            <a:endParaRPr lang="en-GB" altLang="en-US"/>
+          </a:p>
+        </p:txBody>
+      </p:sp>
+      <p:sp>
+        <p:nvSpPr>
+          <p:cNvPr id="61444" name="Rectangle 2"/>
+          <p:cNvSpPr>
+            <a:spLocks noGrp="1" noRot="1" noChangeAspect="1" noChangeArrowheads="1" noTextEdit="1"/>
+          </p:cNvSpPr>
+          <p:nvPr>
+            <p:ph type="sldImg"/>
+          </p:nvPr>
+        </p:nvSpPr>
+        <p:spPr bwMode="auto">
+          <a:noFill/>
+          <a:ln>
+            <a:solidFill>
+              <a:srgbClr val="000000"/>
+            </a:solidFill>
+            <a:miter lim="800000"/>
+            <a:headEnd/>
+            <a:tailEnd/>
+          </a:ln>
+          <a:extLst>
+            <a:ext uri="{909E8E84-426E-40DD-AFC4-6F175D3DCCD1}">
+              <a14:hiddenFill xmlns:a14="http://schemas.microsoft.com/office/drawing/2010/main">
+                <a:solidFill>
+                  <a:srgbClr val="FFFFFF"/>
+                </a:solidFill>
+              </a14:hiddenFill>
+            </a:ext>
+          </a:extLst>
+        </p:spPr>
+      </p:sp>
+      <p:sp>
+        <p:nvSpPr>
+          <p:cNvPr id="61445" name="Rectangle 3"/>
+          <p:cNvSpPr>
+            <a:spLocks noGrp="1" noChangeArrowheads="1"/>
+          </p:cNvSpPr>
+          <p:nvPr>
+            <p:ph type="body" idx="1"/>
+          </p:nvPr>
+        </p:nvSpPr>
+        <p:spPr bwMode="auto">
+          <a:noFill/>
+          <a:extLst>
+            <a:ext uri="{909E8E84-426E-40DD-AFC4-6F175D3DCCD1}">
+              <a14:hiddenFill xmlns:a14="http://schemas.microsoft.com/office/drawing/2010/main">
+                <a:solidFill>
+                  <a:srgbClr val="FFFFFF"/>
+                </a:solidFill>
+              </a14:hiddenFill>
+            </a:ext>
+            <a:ext uri="{91240B29-F687-4F45-9708-019B960494DF}">
+              <a14:hiddenLine xmlns:a14="http://schemas.microsoft.com/office/drawing/2010/main" w="9525">
+                <a:solidFill>
+                  <a:srgbClr val="000000"/>
+                </a:solidFill>
+                <a:miter lim="800000"/>
+                <a:headEnd/>
+                <a:tailEnd/>
+              </a14:hiddenLine>
+            </a:ext>
+          </a:extLst>
+        </p:spPr>
+        <p:txBody>
+          <a:bodyPr wrap="square" numCol="1" anchor="t" anchorCtr="0" compatLnSpc="1">
+            <a:prstTxWarp prst="textNoShape">
+              <a:avLst/>
+            </a:prstTxWarp>
+          </a:bodyPr>
+          <a:lstStyle/>
+          <a:p>
+            <a:pPr>
+              <a:spcBef>
+                <a:spcPct val="0"/>
+              </a:spcBef>
+            </a:pPr>
+            <a:r>
+              <a:rPr lang="en-US" altLang="en-US" dirty="0"/>
+              <a:t>The “update the LCV” should always update it so that the Boolean condition will eventually evaluation to false. </a:t>
+            </a:r>
+          </a:p>
+        </p:txBody>
+      </p:sp>
+    </p:spTree>
+    <p:extLst>
+      <p:ext uri="{BB962C8B-B14F-4D97-AF65-F5344CB8AC3E}">
+        <p14:creationId xmlns:p14="http://schemas.microsoft.com/office/powerpoint/2010/main" val="3967997845"/>
+      </p:ext>
+    </p:extLst>
+  </p:cSld>
+  <p:clrMapOvr>
+    <a:masterClrMapping/>
+  </p:clrMapOvr>
+</p:notes>
+</file>
+
+<file path=ppt/notesSlides/notesSlide9.xml><?xml version="1.0" encoding="utf-8"?>
+<p:notes xmlns:a="http://schemas.openxmlformats.org/drawingml/2006/main" xmlns:r="http://schemas.openxmlformats.org/officeDocument/2006/relationships" xmlns:p="http://schemas.openxmlformats.org/presentationml/2006/main">
+  <p:cSld>
+    <p:spTree>
+      <p:nvGrpSpPr>
+        <p:cNvPr id="1" name=""/>
+        <p:cNvGrpSpPr/>
+        <p:nvPr/>
+      </p:nvGrpSpPr>
+      <p:grpSpPr>
+        <a:xfrm>
+          <a:off x="0" y="0"/>
+          <a:ext cx="0" cy="0"/>
+          <a:chOff x="0" y="0"/>
+          <a:chExt cx="0" cy="0"/>
+        </a:xfrm>
+      </p:grpSpPr>
+      <p:sp>
+        <p:nvSpPr>
+          <p:cNvPr id="4" name="Rectangle 2"/>
+          <p:cNvSpPr>
+            <a:spLocks noGrp="1" noChangeArrowheads="1"/>
+          </p:cNvSpPr>
+          <p:nvPr>
+            <p:ph type="hdr" sz="quarter"/>
+          </p:nvPr>
+        </p:nvSpPr>
+        <p:spPr>
+          <a:ln/>
+        </p:spPr>
+        <p:txBody>
+          <a:bodyPr/>
+          <a:lstStyle/>
+          <a:p>
+            <a:r>
+              <a:rPr lang="en-GB"/>
+              <a:t>Objects First with Java</a:t>
+            </a:r>
+          </a:p>
+        </p:txBody>
+      </p:sp>
+      <p:sp>
+        <p:nvSpPr>
+          <p:cNvPr id="5" name="Rectangle 6"/>
+          <p:cNvSpPr>
+            <a:spLocks noGrp="1" noChangeArrowheads="1"/>
+          </p:cNvSpPr>
+          <p:nvPr>
+            <p:ph type="ftr" sz="quarter" idx="4"/>
+          </p:nvPr>
+        </p:nvSpPr>
+        <p:spPr>
+          <a:ln/>
+        </p:spPr>
+        <p:txBody>
+          <a:bodyPr/>
+          <a:lstStyle/>
+          <a:p>
+            <a:r>
+              <a:rPr lang="en-GB"/>
+              <a:t>© David J. Barnes and Michael Kölling</a:t>
+            </a:r>
+          </a:p>
+        </p:txBody>
+      </p:sp>
+      <p:sp>
+        <p:nvSpPr>
+          <p:cNvPr id="6" name="Rectangle 7"/>
+          <p:cNvSpPr>
+            <a:spLocks noGrp="1" noChangeArrowheads="1"/>
+          </p:cNvSpPr>
+          <p:nvPr>
+            <p:ph type="sldNum" sz="quarter" idx="5"/>
+          </p:nvPr>
+        </p:nvSpPr>
+        <p:spPr>
+          <a:ln/>
+        </p:spPr>
+        <p:txBody>
+          <a:bodyPr/>
+          <a:lstStyle/>
+          <a:p>
             <a:fld id="{475206F4-4E20-479E-ABC0-0EB3661565C0}" type="slidenum">
               <a:rPr lang="en-GB"/>
               <a:pPr/>
-              <a:t>12</a:t>
+              <a:t>14</a:t>
             </a:fld>
             <a:endParaRPr lang="en-GB"/>
           </a:p>
@@ -8275,6 +9451,700 @@
 </file>
 
 <file path=ppt/slides/slide10.xml><?xml version="1.0" encoding="utf-8"?>
+<p:sld xmlns:a="http://schemas.openxmlformats.org/drawingml/2006/main" xmlns:r="http://schemas.openxmlformats.org/officeDocument/2006/relationships" xmlns:p="http://schemas.openxmlformats.org/presentationml/2006/main">
+  <p:cSld>
+    <p:spTree>
+      <p:nvGrpSpPr>
+        <p:cNvPr id="1" name=""/>
+        <p:cNvGrpSpPr/>
+        <p:nvPr/>
+      </p:nvGrpSpPr>
+      <p:grpSpPr>
+        <a:xfrm>
+          <a:off x="0" y="0"/>
+          <a:ext cx="0" cy="0"/>
+          <a:chOff x="0" y="0"/>
+          <a:chExt cx="0" cy="0"/>
+        </a:xfrm>
+      </p:grpSpPr>
+      <p:sp>
+        <p:nvSpPr>
+          <p:cNvPr id="2" name="Title 1"/>
+          <p:cNvSpPr>
+            <a:spLocks noGrp="1"/>
+          </p:cNvSpPr>
+          <p:nvPr>
+            <p:ph type="title"/>
+          </p:nvPr>
+        </p:nvSpPr>
+        <p:spPr/>
+        <p:txBody>
+          <a:bodyPr/>
+          <a:lstStyle/>
+          <a:p>
+            <a:r>
+              <a:rPr lang="en-IE"/>
+              <a:t>Topics list</a:t>
+            </a:r>
+            <a:endParaRPr lang="en-IE" dirty="0"/>
+          </a:p>
+        </p:txBody>
+      </p:sp>
+      <p:sp>
+        <p:nvSpPr>
+          <p:cNvPr id="5" name="Content Placeholder 4"/>
+          <p:cNvSpPr>
+            <a:spLocks noGrp="1"/>
+          </p:cNvSpPr>
+          <p:nvPr>
+            <p:ph idx="1"/>
+          </p:nvPr>
+        </p:nvSpPr>
+        <p:spPr/>
+        <p:txBody>
+          <a:bodyPr>
+            <a:normAutofit/>
+          </a:bodyPr>
+          <a:lstStyle/>
+          <a:p>
+            <a:endParaRPr lang="en-IE" dirty="0"/>
+          </a:p>
+          <a:p>
+            <a:pPr marL="0" indent="0">
+              <a:buNone/>
+            </a:pPr>
+            <a:endParaRPr lang="en-IE" dirty="0"/>
+          </a:p>
+          <a:p>
+            <a:pPr marL="514350" indent="-514350">
+              <a:buFont typeface="+mj-lt"/>
+              <a:buAutoNum type="arabicPeriod"/>
+            </a:pPr>
+            <a:r>
+              <a:rPr lang="en-IE" dirty="0"/>
+              <a:t>Repetition in Programming – Intro to looping</a:t>
+            </a:r>
+          </a:p>
+          <a:p>
+            <a:endParaRPr lang="en-IE" dirty="0"/>
+          </a:p>
+          <a:p>
+            <a:pPr marL="514350" indent="-514350">
+              <a:buFont typeface="+mj-lt"/>
+              <a:buAutoNum type="arabicPeriod" startAt="2"/>
+            </a:pPr>
+            <a:r>
+              <a:rPr lang="en-IE" dirty="0"/>
+              <a:t>Use of loops (while loops).</a:t>
+            </a:r>
+          </a:p>
+          <a:p>
+            <a:pPr marL="0" indent="0">
+              <a:buNone/>
+            </a:pPr>
+            <a:endParaRPr lang="en-IE" dirty="0"/>
+          </a:p>
+        </p:txBody>
+      </p:sp>
+      <p:sp>
+        <p:nvSpPr>
+          <p:cNvPr id="6" name="Rectangle 5"/>
+          <p:cNvSpPr/>
+          <p:nvPr/>
+        </p:nvSpPr>
+        <p:spPr>
+          <a:xfrm>
+            <a:off x="457200" y="3347712"/>
+            <a:ext cx="4419600" cy="533400"/>
+          </a:xfrm>
+          <a:prstGeom prst="rect">
+            <a:avLst/>
+          </a:prstGeom>
+          <a:noFill/>
+          <a:ln w="44450">
+            <a:solidFill>
+              <a:srgbClr val="FF0000"/>
+            </a:solidFill>
+          </a:ln>
+        </p:spPr>
+        <p:style>
+          <a:lnRef idx="2">
+            <a:schemeClr val="accent1">
+              <a:shade val="50000"/>
+            </a:schemeClr>
+          </a:lnRef>
+          <a:fillRef idx="1">
+            <a:schemeClr val="accent1"/>
+          </a:fillRef>
+          <a:effectRef idx="0">
+            <a:schemeClr val="accent1"/>
+          </a:effectRef>
+          <a:fontRef idx="minor">
+            <a:schemeClr val="lt1"/>
+          </a:fontRef>
+        </p:style>
+        <p:txBody>
+          <a:bodyPr rtlCol="0" anchor="ctr"/>
+          <a:lstStyle/>
+          <a:p>
+            <a:pPr algn="ctr"/>
+            <a:endParaRPr lang="en-IE"/>
+          </a:p>
+        </p:txBody>
+      </p:sp>
+    </p:spTree>
+    <p:extLst>
+      <p:ext uri="{BB962C8B-B14F-4D97-AF65-F5344CB8AC3E}">
+        <p14:creationId xmlns:p14="http://schemas.microsoft.com/office/powerpoint/2010/main" val="1727151845"/>
+      </p:ext>
+    </p:extLst>
+  </p:cSld>
+  <p:clrMapOvr>
+    <a:masterClrMapping/>
+  </p:clrMapOvr>
+  <p:timing>
+    <p:tnLst>
+      <p:par>
+        <p:cTn id="1" dur="indefinite" restart="never" nodeType="tmRoot">
+          <p:childTnLst>
+            <p:seq concurrent="1" nextAc="seek">
+              <p:cTn id="2" dur="indefinite" nodeType="mainSeq">
+                <p:childTnLst>
+                  <p:par>
+                    <p:cTn id="3" fill="hold">
+                      <p:stCondLst>
+                        <p:cond delay="indefinite"/>
+                      </p:stCondLst>
+                      <p:childTnLst>
+                        <p:par>
+                          <p:cTn id="4" fill="hold">
+                            <p:stCondLst>
+                              <p:cond delay="0"/>
+                            </p:stCondLst>
+                            <p:childTnLst>
+                              <p:par>
+                                <p:cTn id="5" presetID="21" presetClass="entr" presetSubtype="1" fill="hold" grpId="0" nodeType="clickEffect">
+                                  <p:stCondLst>
+                                    <p:cond delay="0"/>
+                                  </p:stCondLst>
+                                  <p:childTnLst>
+                                    <p:set>
+                                      <p:cBhvr>
+                                        <p:cTn id="6" dur="1" fill="hold">
+                                          <p:stCondLst>
+                                            <p:cond delay="0"/>
+                                          </p:stCondLst>
+                                        </p:cTn>
+                                        <p:tgtEl>
+                                          <p:spTgt spid="6"/>
+                                        </p:tgtEl>
+                                        <p:attrNameLst>
+                                          <p:attrName>style.visibility</p:attrName>
+                                        </p:attrNameLst>
+                                      </p:cBhvr>
+                                      <p:to>
+                                        <p:strVal val="visible"/>
+                                      </p:to>
+                                    </p:set>
+                                    <p:animEffect transition="in" filter="wheel(1)">
+                                      <p:cBhvr>
+                                        <p:cTn id="7" dur="2000"/>
+                                        <p:tgtEl>
+                                          <p:spTgt spid="6"/>
+                                        </p:tgtEl>
+                                      </p:cBhvr>
+                                    </p:animEffect>
+                                  </p:childTnLst>
+                                </p:cTn>
+                              </p:par>
+                            </p:childTnLst>
+                          </p:cTn>
+                        </p:par>
+                      </p:childTnLst>
+                    </p:cTn>
+                  </p:par>
+                </p:childTnLst>
+              </p:cTn>
+              <p:prevCondLst>
+                <p:cond evt="onPrev" delay="0">
+                  <p:tgtEl>
+                    <p:sldTgt/>
+                  </p:tgtEl>
+                </p:cond>
+              </p:prevCondLst>
+              <p:nextCondLst>
+                <p:cond evt="onNext" delay="0">
+                  <p:tgtEl>
+                    <p:sldTgt/>
+                  </p:tgtEl>
+                </p:cond>
+              </p:nextCondLst>
+            </p:seq>
+          </p:childTnLst>
+        </p:cTn>
+      </p:par>
+    </p:tnLst>
+    <p:bldLst>
+      <p:bldP spid="6" grpId="0" animBg="1"/>
+    </p:bldLst>
+  </p:timing>
+</p:sld>
+</file>
+
+<file path=ppt/slides/slide11.xml><?xml version="1.0" encoding="utf-8"?>
+<p:sld xmlns:a="http://schemas.openxmlformats.org/drawingml/2006/main" xmlns:r="http://schemas.openxmlformats.org/officeDocument/2006/relationships" xmlns:p="http://schemas.openxmlformats.org/presentationml/2006/main">
+  <p:cSld>
+    <p:spTree>
+      <p:nvGrpSpPr>
+        <p:cNvPr id="1" name=""/>
+        <p:cNvGrpSpPr/>
+        <p:nvPr/>
+      </p:nvGrpSpPr>
+      <p:grpSpPr>
+        <a:xfrm>
+          <a:off x="0" y="0"/>
+          <a:ext cx="0" cy="0"/>
+          <a:chOff x="0" y="0"/>
+          <a:chExt cx="0" cy="0"/>
+        </a:xfrm>
+      </p:grpSpPr>
+      <p:sp>
+        <p:nvSpPr>
+          <p:cNvPr id="2" name="Title 1"/>
+          <p:cNvSpPr>
+            <a:spLocks noGrp="1"/>
+          </p:cNvSpPr>
+          <p:nvPr>
+            <p:ph type="title"/>
+          </p:nvPr>
+        </p:nvSpPr>
+        <p:spPr/>
+        <p:txBody>
+          <a:bodyPr/>
+          <a:lstStyle/>
+          <a:p>
+            <a:r>
+              <a:rPr lang="en-IE" dirty="0"/>
+              <a:t>Loops in Programming</a:t>
+            </a:r>
+          </a:p>
+        </p:txBody>
+      </p:sp>
+      <p:sp>
+        <p:nvSpPr>
+          <p:cNvPr id="3" name="Content Placeholder 2"/>
+          <p:cNvSpPr>
+            <a:spLocks noGrp="1"/>
+          </p:cNvSpPr>
+          <p:nvPr>
+            <p:ph idx="1"/>
+          </p:nvPr>
+        </p:nvSpPr>
+        <p:spPr/>
+        <p:txBody>
+          <a:bodyPr/>
+          <a:lstStyle/>
+          <a:p>
+            <a:r>
+              <a:rPr lang="en-IE" dirty="0"/>
+              <a:t>There are three types of loop in (Java) programming:</a:t>
+            </a:r>
+          </a:p>
+          <a:p>
+            <a:endParaRPr lang="en-IE" dirty="0"/>
+          </a:p>
+          <a:p>
+            <a:pPr lvl="1"/>
+            <a:r>
+              <a:rPr lang="en-IE" b="1" dirty="0"/>
+              <a:t>while</a:t>
+            </a:r>
+            <a:r>
+              <a:rPr lang="en-IE" dirty="0"/>
+              <a:t> loops</a:t>
+            </a:r>
+          </a:p>
+          <a:p>
+            <a:pPr lvl="1"/>
+            <a:r>
+              <a:rPr lang="en-IE" b="1" dirty="0"/>
+              <a:t>for</a:t>
+            </a:r>
+            <a:r>
+              <a:rPr lang="en-IE" dirty="0"/>
+              <a:t> loops</a:t>
+            </a:r>
+          </a:p>
+          <a:p>
+            <a:pPr lvl="1"/>
+            <a:r>
+              <a:rPr lang="en-IE" b="1" dirty="0"/>
+              <a:t>do while</a:t>
+            </a:r>
+            <a:r>
+              <a:rPr lang="en-IE" dirty="0"/>
+              <a:t> loops</a:t>
+            </a:r>
+          </a:p>
+          <a:p>
+            <a:pPr lvl="1"/>
+            <a:endParaRPr lang="en-IE" dirty="0"/>
+          </a:p>
+        </p:txBody>
+      </p:sp>
+    </p:spTree>
+    <p:extLst>
+      <p:ext uri="{BB962C8B-B14F-4D97-AF65-F5344CB8AC3E}">
+        <p14:creationId xmlns:p14="http://schemas.microsoft.com/office/powerpoint/2010/main" val="2874484904"/>
+      </p:ext>
+    </p:extLst>
+  </p:cSld>
+  <p:clrMapOvr>
+    <a:masterClrMapping/>
+  </p:clrMapOvr>
+  <p:timing>
+    <p:tnLst>
+      <p:par>
+        <p:cTn id="1" dur="indefinite" restart="never" nodeType="tmRoot">
+          <p:childTnLst>
+            <p:seq concurrent="1" nextAc="seek">
+              <p:cTn id="2" dur="indefinite" nodeType="mainSeq">
+                <p:childTnLst>
+                  <p:par>
+                    <p:cTn id="3" fill="hold">
+                      <p:stCondLst>
+                        <p:cond delay="indefinite"/>
+                      </p:stCondLst>
+                      <p:childTnLst>
+                        <p:par>
+                          <p:cTn id="4" fill="hold">
+                            <p:stCondLst>
+                              <p:cond delay="0"/>
+                            </p:stCondLst>
+                            <p:childTnLst>
+                              <p:par>
+                                <p:cTn id="5" presetID="2" presetClass="entr" presetSubtype="4" fill="hold" nodeType="clickEffect">
+                                  <p:stCondLst>
+                                    <p:cond delay="0"/>
+                                  </p:stCondLst>
+                                  <p:childTnLst>
+                                    <p:set>
+                                      <p:cBhvr>
+                                        <p:cTn id="6" dur="1" fill="hold">
+                                          <p:stCondLst>
+                                            <p:cond delay="0"/>
+                                          </p:stCondLst>
+                                        </p:cTn>
+                                        <p:tgtEl>
+                                          <p:spTgt spid="3">
+                                            <p:txEl>
+                                              <p:pRg st="2" end="2"/>
+                                            </p:txEl>
+                                          </p:spTgt>
+                                        </p:tgtEl>
+                                        <p:attrNameLst>
+                                          <p:attrName>style.visibility</p:attrName>
+                                        </p:attrNameLst>
+                                      </p:cBhvr>
+                                      <p:to>
+                                        <p:strVal val="visible"/>
+                                      </p:to>
+                                    </p:set>
+                                    <p:anim calcmode="lin" valueType="num">
+                                      <p:cBhvr additive="base">
+                                        <p:cTn id="7" dur="500" fill="hold"/>
+                                        <p:tgtEl>
+                                          <p:spTgt spid="3">
+                                            <p:txEl>
+                                              <p:pRg st="2" end="2"/>
+                                            </p:txEl>
+                                          </p:spTgt>
+                                        </p:tgtEl>
+                                        <p:attrNameLst>
+                                          <p:attrName>ppt_x</p:attrName>
+                                        </p:attrNameLst>
+                                      </p:cBhvr>
+                                      <p:tavLst>
+                                        <p:tav tm="0">
+                                          <p:val>
+                                            <p:strVal val="#ppt_x"/>
+                                          </p:val>
+                                        </p:tav>
+                                        <p:tav tm="100000">
+                                          <p:val>
+                                            <p:strVal val="#ppt_x"/>
+                                          </p:val>
+                                        </p:tav>
+                                      </p:tavLst>
+                                    </p:anim>
+                                    <p:anim calcmode="lin" valueType="num">
+                                      <p:cBhvr additive="base">
+                                        <p:cTn id="8" dur="500" fill="hold"/>
+                                        <p:tgtEl>
+                                          <p:spTgt spid="3">
+                                            <p:txEl>
+                                              <p:pRg st="2" end="2"/>
+                                            </p:txEl>
+                                          </p:spTgt>
+                                        </p:tgtEl>
+                                        <p:attrNameLst>
+                                          <p:attrName>ppt_y</p:attrName>
+                                        </p:attrNameLst>
+                                      </p:cBhvr>
+                                      <p:tavLst>
+                                        <p:tav tm="0">
+                                          <p:val>
+                                            <p:strVal val="1+#ppt_h/2"/>
+                                          </p:val>
+                                        </p:tav>
+                                        <p:tav tm="100000">
+                                          <p:val>
+                                            <p:strVal val="#ppt_y"/>
+                                          </p:val>
+                                        </p:tav>
+                                      </p:tavLst>
+                                    </p:anim>
+                                  </p:childTnLst>
+                                </p:cTn>
+                              </p:par>
+                            </p:childTnLst>
+                          </p:cTn>
+                        </p:par>
+                      </p:childTnLst>
+                    </p:cTn>
+                  </p:par>
+                  <p:par>
+                    <p:cTn id="9" fill="hold">
+                      <p:stCondLst>
+                        <p:cond delay="indefinite"/>
+                      </p:stCondLst>
+                      <p:childTnLst>
+                        <p:par>
+                          <p:cTn id="10" fill="hold">
+                            <p:stCondLst>
+                              <p:cond delay="0"/>
+                            </p:stCondLst>
+                            <p:childTnLst>
+                              <p:par>
+                                <p:cTn id="11" presetID="2" presetClass="entr" presetSubtype="4" fill="hold" nodeType="clickEffect">
+                                  <p:stCondLst>
+                                    <p:cond delay="0"/>
+                                  </p:stCondLst>
+                                  <p:childTnLst>
+                                    <p:set>
+                                      <p:cBhvr>
+                                        <p:cTn id="12" dur="1" fill="hold">
+                                          <p:stCondLst>
+                                            <p:cond delay="0"/>
+                                          </p:stCondLst>
+                                        </p:cTn>
+                                        <p:tgtEl>
+                                          <p:spTgt spid="3">
+                                            <p:txEl>
+                                              <p:pRg st="3" end="3"/>
+                                            </p:txEl>
+                                          </p:spTgt>
+                                        </p:tgtEl>
+                                        <p:attrNameLst>
+                                          <p:attrName>style.visibility</p:attrName>
+                                        </p:attrNameLst>
+                                      </p:cBhvr>
+                                      <p:to>
+                                        <p:strVal val="visible"/>
+                                      </p:to>
+                                    </p:set>
+                                    <p:anim calcmode="lin" valueType="num">
+                                      <p:cBhvr additive="base">
+                                        <p:cTn id="13" dur="500" fill="hold"/>
+                                        <p:tgtEl>
+                                          <p:spTgt spid="3">
+                                            <p:txEl>
+                                              <p:pRg st="3" end="3"/>
+                                            </p:txEl>
+                                          </p:spTgt>
+                                        </p:tgtEl>
+                                        <p:attrNameLst>
+                                          <p:attrName>ppt_x</p:attrName>
+                                        </p:attrNameLst>
+                                      </p:cBhvr>
+                                      <p:tavLst>
+                                        <p:tav tm="0">
+                                          <p:val>
+                                            <p:strVal val="#ppt_x"/>
+                                          </p:val>
+                                        </p:tav>
+                                        <p:tav tm="100000">
+                                          <p:val>
+                                            <p:strVal val="#ppt_x"/>
+                                          </p:val>
+                                        </p:tav>
+                                      </p:tavLst>
+                                    </p:anim>
+                                    <p:anim calcmode="lin" valueType="num">
+                                      <p:cBhvr additive="base">
+                                        <p:cTn id="14" dur="500" fill="hold"/>
+                                        <p:tgtEl>
+                                          <p:spTgt spid="3">
+                                            <p:txEl>
+                                              <p:pRg st="3" end="3"/>
+                                            </p:txEl>
+                                          </p:spTgt>
+                                        </p:tgtEl>
+                                        <p:attrNameLst>
+                                          <p:attrName>ppt_y</p:attrName>
+                                        </p:attrNameLst>
+                                      </p:cBhvr>
+                                      <p:tavLst>
+                                        <p:tav tm="0">
+                                          <p:val>
+                                            <p:strVal val="1+#ppt_h/2"/>
+                                          </p:val>
+                                        </p:tav>
+                                        <p:tav tm="100000">
+                                          <p:val>
+                                            <p:strVal val="#ppt_y"/>
+                                          </p:val>
+                                        </p:tav>
+                                      </p:tavLst>
+                                    </p:anim>
+                                  </p:childTnLst>
+                                </p:cTn>
+                              </p:par>
+                            </p:childTnLst>
+                          </p:cTn>
+                        </p:par>
+                      </p:childTnLst>
+                    </p:cTn>
+                  </p:par>
+                  <p:par>
+                    <p:cTn id="15" fill="hold">
+                      <p:stCondLst>
+                        <p:cond delay="indefinite"/>
+                      </p:stCondLst>
+                      <p:childTnLst>
+                        <p:par>
+                          <p:cTn id="16" fill="hold">
+                            <p:stCondLst>
+                              <p:cond delay="0"/>
+                            </p:stCondLst>
+                            <p:childTnLst>
+                              <p:par>
+                                <p:cTn id="17" presetID="2" presetClass="entr" presetSubtype="4" fill="hold" nodeType="clickEffect">
+                                  <p:stCondLst>
+                                    <p:cond delay="0"/>
+                                  </p:stCondLst>
+                                  <p:childTnLst>
+                                    <p:set>
+                                      <p:cBhvr>
+                                        <p:cTn id="18" dur="1" fill="hold">
+                                          <p:stCondLst>
+                                            <p:cond delay="0"/>
+                                          </p:stCondLst>
+                                        </p:cTn>
+                                        <p:tgtEl>
+                                          <p:spTgt spid="3">
+                                            <p:txEl>
+                                              <p:pRg st="4" end="4"/>
+                                            </p:txEl>
+                                          </p:spTgt>
+                                        </p:tgtEl>
+                                        <p:attrNameLst>
+                                          <p:attrName>style.visibility</p:attrName>
+                                        </p:attrNameLst>
+                                      </p:cBhvr>
+                                      <p:to>
+                                        <p:strVal val="visible"/>
+                                      </p:to>
+                                    </p:set>
+                                    <p:anim calcmode="lin" valueType="num">
+                                      <p:cBhvr additive="base">
+                                        <p:cTn id="19" dur="500" fill="hold"/>
+                                        <p:tgtEl>
+                                          <p:spTgt spid="3">
+                                            <p:txEl>
+                                              <p:pRg st="4" end="4"/>
+                                            </p:txEl>
+                                          </p:spTgt>
+                                        </p:tgtEl>
+                                        <p:attrNameLst>
+                                          <p:attrName>ppt_x</p:attrName>
+                                        </p:attrNameLst>
+                                      </p:cBhvr>
+                                      <p:tavLst>
+                                        <p:tav tm="0">
+                                          <p:val>
+                                            <p:strVal val="#ppt_x"/>
+                                          </p:val>
+                                        </p:tav>
+                                        <p:tav tm="100000">
+                                          <p:val>
+                                            <p:strVal val="#ppt_x"/>
+                                          </p:val>
+                                        </p:tav>
+                                      </p:tavLst>
+                                    </p:anim>
+                                    <p:anim calcmode="lin" valueType="num">
+                                      <p:cBhvr additive="base">
+                                        <p:cTn id="20" dur="500" fill="hold"/>
+                                        <p:tgtEl>
+                                          <p:spTgt spid="3">
+                                            <p:txEl>
+                                              <p:pRg st="4" end="4"/>
+                                            </p:txEl>
+                                          </p:spTgt>
+                                        </p:tgtEl>
+                                        <p:attrNameLst>
+                                          <p:attrName>ppt_y</p:attrName>
+                                        </p:attrNameLst>
+                                      </p:cBhvr>
+                                      <p:tavLst>
+                                        <p:tav tm="0">
+                                          <p:val>
+                                            <p:strVal val="1+#ppt_h/2"/>
+                                          </p:val>
+                                        </p:tav>
+                                        <p:tav tm="100000">
+                                          <p:val>
+                                            <p:strVal val="#ppt_y"/>
+                                          </p:val>
+                                        </p:tav>
+                                      </p:tavLst>
+                                    </p:anim>
+                                  </p:childTnLst>
+                                </p:cTn>
+                              </p:par>
+                            </p:childTnLst>
+                          </p:cTn>
+                        </p:par>
+                      </p:childTnLst>
+                    </p:cTn>
+                  </p:par>
+                </p:childTnLst>
+              </p:cTn>
+              <p:prevCondLst>
+                <p:cond evt="onPrev" delay="0">
+                  <p:tgtEl>
+                    <p:sldTgt/>
+                  </p:tgtEl>
+                </p:cond>
+              </p:prevCondLst>
+              <p:nextCondLst>
+                <p:cond evt="onNext" delay="0">
+                  <p:tgtEl>
+                    <p:sldTgt/>
+                  </p:tgtEl>
+                </p:cond>
+              </p:nextCondLst>
+            </p:seq>
+          </p:childTnLst>
+        </p:cTn>
+      </p:par>
+    </p:tnLst>
+  </p:timing>
+</p:sld>
+</file>
+
+<file path=ppt/slides/slide12.xml><?xml version="1.0" encoding="utf-8"?>
 <p:sld xmlns:a="http://schemas.openxmlformats.org/drawingml/2006/main" xmlns:r="http://schemas.openxmlformats.org/officeDocument/2006/relationships" xmlns:p="http://schemas.openxmlformats.org/presentationml/2006/main">
   <p:cSld>
     <p:spTree>
@@ -9518,7 +11388,7 @@
 </p:sld>
 </file>
 
-<file path=ppt/slides/slide11.xml><?xml version="1.0" encoding="utf-8"?>
+<file path=ppt/slides/slide13.xml><?xml version="1.0" encoding="utf-8"?>
 <p:sld xmlns:a="http://schemas.openxmlformats.org/drawingml/2006/main" xmlns:r="http://schemas.openxmlformats.org/officeDocument/2006/relationships" xmlns:p="http://schemas.openxmlformats.org/presentationml/2006/main">
   <p:cSld>
     <p:spTree>
@@ -10029,7 +11899,7 @@
 </p:sld>
 </file>
 
-<file path=ppt/slides/slide12.xml><?xml version="1.0" encoding="utf-8"?>
+<file path=ppt/slides/slide14.xml><?xml version="1.0" encoding="utf-8"?>
 <p:sld xmlns:a="http://schemas.openxmlformats.org/drawingml/2006/main" xmlns:r="http://schemas.openxmlformats.org/officeDocument/2006/relationships" xmlns:p="http://schemas.openxmlformats.org/presentationml/2006/main">
   <p:cSld>
     <p:spTree>
@@ -10809,7 +12679,7 @@
 </p:sld>
 </file>
 
-<file path=ppt/slides/slide13.xml><?xml version="1.0" encoding="utf-8"?>
+<file path=ppt/slides/slide15.xml><?xml version="1.0" encoding="utf-8"?>
 <p:sld xmlns:a="http://schemas.openxmlformats.org/drawingml/2006/main" xmlns:r="http://schemas.openxmlformats.org/officeDocument/2006/relationships" xmlns:p="http://schemas.openxmlformats.org/presentationml/2006/main">
   <p:cSld>
     <p:spTree>
@@ -11319,7 +13189,7 @@
 </p:sld>
 </file>
 
-<file path=ppt/slides/slide14.xml><?xml version="1.0" encoding="utf-8"?>
+<file path=ppt/slides/slide16.xml><?xml version="1.0" encoding="utf-8"?>
 <p:sld xmlns:a="http://schemas.openxmlformats.org/drawingml/2006/main" xmlns:r="http://schemas.openxmlformats.org/officeDocument/2006/relationships" xmlns:p="http://schemas.openxmlformats.org/presentationml/2006/main">
   <p:cSld>
     <p:spTree>
@@ -11449,7 +13319,7 @@
 </p:sld>
 </file>
 
-<file path=ppt/slides/slide15.xml><?xml version="1.0" encoding="utf-8"?>
+<file path=ppt/slides/slide17.xml><?xml version="1.0" encoding="utf-8"?>
 <p:sld xmlns:a="http://schemas.openxmlformats.org/drawingml/2006/main" xmlns:r="http://schemas.openxmlformats.org/officeDocument/2006/relationships" xmlns:p="http://schemas.openxmlformats.org/presentationml/2006/main">
   <p:cSld>
     <p:spTree>
@@ -12876,6 +14746,740 @@
           <a:p>
             <a:r>
               <a:rPr lang="en-US" altLang="en-US" dirty="0"/>
+              <a:t>Scenario: </a:t>
+            </a:r>
+            <a:r>
+              <a:rPr lang="en-US" dirty="0"/>
+              <a:t>Checking Tickets at a Cinema</a:t>
+            </a:r>
+            <a:endParaRPr lang="en-US" altLang="en-US" dirty="0"/>
+          </a:p>
+        </p:txBody>
+      </p:sp>
+      <p:sp>
+        <p:nvSpPr>
+          <p:cNvPr id="6146" name="Rectangle 5"/>
+          <p:cNvSpPr>
+            <a:spLocks noGrp="1" noChangeArrowheads="1"/>
+          </p:cNvSpPr>
+          <p:nvPr>
+            <p:ph type="body" idx="1"/>
+          </p:nvPr>
+        </p:nvSpPr>
+        <p:spPr>
+          <a:xfrm>
+            <a:off x="457200" y="2000251"/>
+            <a:ext cx="8229600" cy="3394472"/>
+          </a:xfrm>
+        </p:spPr>
+        <p:txBody>
+          <a:bodyPr>
+            <a:normAutofit/>
+          </a:bodyPr>
+          <a:lstStyle/>
+          <a:p>
+            <a:pPr marL="0" indent="0">
+              <a:buNone/>
+            </a:pPr>
+            <a:r>
+              <a:rPr lang="en-US" dirty="0"/>
+              <a:t>Imagine you’re working at a cinema. A group of people is coming in for a movie.</a:t>
+            </a:r>
+            <a:br>
+              <a:rPr lang="en-US" dirty="0"/>
+            </a:br>
+            <a:r>
+              <a:rPr lang="en-US" dirty="0"/>
+              <a:t>Your job is to:</a:t>
+            </a:r>
+          </a:p>
+          <a:p>
+            <a:pPr lvl="1"/>
+            <a:r>
+              <a:rPr lang="en-US" b="1" dirty="0"/>
+              <a:t>Check each person’s ticket</a:t>
+            </a:r>
+            <a:r>
+              <a:rPr lang="en-US" dirty="0"/>
+              <a:t> as they enter.</a:t>
+            </a:r>
+          </a:p>
+          <a:p>
+            <a:pPr lvl="1"/>
+            <a:r>
+              <a:rPr lang="en-US" dirty="0"/>
+              <a:t>Let them in if they have a valid ticket.</a:t>
+            </a:r>
+          </a:p>
+          <a:p>
+            <a:pPr lvl="1"/>
+            <a:r>
+              <a:rPr lang="en-US" dirty="0"/>
+              <a:t>Keep a </a:t>
+            </a:r>
+            <a:r>
+              <a:rPr lang="en-US" b="1" dirty="0"/>
+              <a:t>count of how many valid tickets</a:t>
+            </a:r>
+            <a:r>
+              <a:rPr lang="en-US" dirty="0"/>
+              <a:t> you check.</a:t>
+            </a:r>
+          </a:p>
+          <a:p>
+            <a:pPr lvl="1"/>
+            <a:r>
+              <a:rPr lang="en-US" dirty="0"/>
+              <a:t>Stop when there are </a:t>
+            </a:r>
+            <a:r>
+              <a:rPr lang="en-US" b="1" dirty="0"/>
+              <a:t>no more people in the queue (or you have reached a certain number)</a:t>
+            </a:r>
+            <a:r>
+              <a:rPr lang="en-US" dirty="0"/>
+              <a:t>.</a:t>
+            </a:r>
+          </a:p>
+          <a:p>
+            <a:pPr marL="0" indent="0">
+              <a:lnSpc>
+                <a:spcPct val="90000"/>
+              </a:lnSpc>
+              <a:buNone/>
+            </a:pPr>
+            <a:endParaRPr lang="en-US" altLang="en-US" dirty="0"/>
+          </a:p>
+          <a:p>
+            <a:pPr lvl="2">
+              <a:lnSpc>
+                <a:spcPct val="90000"/>
+              </a:lnSpc>
+              <a:buFontTx/>
+              <a:buNone/>
+            </a:pPr>
+            <a:endParaRPr lang="en-US" altLang="en-US" dirty="0"/>
+          </a:p>
+        </p:txBody>
+      </p:sp>
+    </p:spTree>
+    <p:extLst>
+      <p:ext uri="{BB962C8B-B14F-4D97-AF65-F5344CB8AC3E}">
+        <p14:creationId xmlns:p14="http://schemas.microsoft.com/office/powerpoint/2010/main" val="2282506606"/>
+      </p:ext>
+    </p:extLst>
+  </p:cSld>
+  <p:clrMapOvr>
+    <a:masterClrMapping/>
+  </p:clrMapOvr>
+</p:sld>
+</file>
+
+<file path=ppt/slides/slide6.xml><?xml version="1.0" encoding="utf-8"?>
+<p:sld xmlns:a="http://schemas.openxmlformats.org/drawingml/2006/main" xmlns:r="http://schemas.openxmlformats.org/officeDocument/2006/relationships" xmlns:p="http://schemas.openxmlformats.org/presentationml/2006/main">
+  <p:cSld>
+    <p:spTree>
+      <p:nvGrpSpPr>
+        <p:cNvPr id="1" name=""/>
+        <p:cNvGrpSpPr/>
+        <p:nvPr/>
+      </p:nvGrpSpPr>
+      <p:grpSpPr>
+        <a:xfrm>
+          <a:off x="0" y="0"/>
+          <a:ext cx="0" cy="0"/>
+          <a:chOff x="0" y="0"/>
+          <a:chExt cx="0" cy="0"/>
+        </a:xfrm>
+      </p:grpSpPr>
+      <p:sp>
+        <p:nvSpPr>
+          <p:cNvPr id="6145" name="Rectangle 2"/>
+          <p:cNvSpPr>
+            <a:spLocks noGrp="1" noChangeArrowheads="1"/>
+          </p:cNvSpPr>
+          <p:nvPr>
+            <p:ph type="title"/>
+          </p:nvPr>
+        </p:nvSpPr>
+        <p:spPr>
+          <a:xfrm>
+            <a:off x="457197" y="517501"/>
+            <a:ext cx="8229600" cy="857250"/>
+          </a:xfrm>
+        </p:spPr>
+        <p:txBody>
+          <a:bodyPr anchor="ctr">
+            <a:normAutofit/>
+          </a:bodyPr>
+          <a:lstStyle/>
+          <a:p>
+            <a:r>
+              <a:rPr lang="en-US" altLang="en-US" dirty="0"/>
+              <a:t>Form of loop</a:t>
+            </a:r>
+          </a:p>
+        </p:txBody>
+      </p:sp>
+      <p:pic>
+        <p:nvPicPr>
+          <p:cNvPr id="1026" name="Picture 2" descr="Generated image">
+            <a:extLst>
+              <a:ext uri="{FF2B5EF4-FFF2-40B4-BE49-F238E27FC236}">
+                <a16:creationId xmlns:a16="http://schemas.microsoft.com/office/drawing/2014/main" id="{80BEBC99-296C-BA29-9792-7C899A3F3CAA}"/>
+              </a:ext>
+            </a:extLst>
+          </p:cNvPr>
+          <p:cNvPicPr>
+            <a:picLocks noChangeAspect="1" noChangeArrowheads="1"/>
+          </p:cNvPicPr>
+          <p:nvPr/>
+        </p:nvPicPr>
+        <p:blipFill rotWithShape="1">
+          <a:blip r:embed="rId3">
+            <a:extLst>
+              <a:ext uri="{28A0092B-C50C-407E-A947-70E740481C1C}">
+                <a14:useLocalDpi xmlns:a14="http://schemas.microsoft.com/office/drawing/2010/main" val="0"/>
+              </a:ext>
+            </a:extLst>
+          </a:blip>
+          <a:srcRect l="11958" t="11786" r="8625" b="-1"/>
+          <a:stretch>
+            <a:fillRect/>
+          </a:stretch>
+        </p:blipFill>
+        <p:spPr bwMode="auto">
+          <a:xfrm>
+            <a:off x="4648204" y="2457450"/>
+            <a:ext cx="4038593" cy="2994423"/>
+          </a:xfrm>
+          <a:prstGeom prst="rect">
+            <a:avLst/>
+          </a:prstGeom>
+          <a:noFill/>
+          <a:extLst>
+            <a:ext uri="{909E8E84-426E-40DD-AFC4-6F175D3DCCD1}">
+              <a14:hiddenFill xmlns:a14="http://schemas.microsoft.com/office/drawing/2010/main">
+                <a:solidFill>
+                  <a:srgbClr val="FFFFFF"/>
+                </a:solidFill>
+              </a14:hiddenFill>
+            </a:ext>
+          </a:extLst>
+        </p:spPr>
+      </p:pic>
+      <p:graphicFrame>
+        <p:nvGraphicFramePr>
+          <p:cNvPr id="2" name="Content Placeholder 1">
+            <a:extLst>
+              <a:ext uri="{FF2B5EF4-FFF2-40B4-BE49-F238E27FC236}">
+                <a16:creationId xmlns:a16="http://schemas.microsoft.com/office/drawing/2014/main" id="{BAB425A9-637C-10FB-04F5-EE038AE85297}"/>
+              </a:ext>
+            </a:extLst>
+          </p:cNvPr>
+          <p:cNvGraphicFramePr>
+            <a:graphicFrameLocks noGrp="1"/>
+          </p:cNvGraphicFramePr>
+          <p:nvPr>
+            <p:ph sz="half" idx="1"/>
+          </p:nvPr>
+        </p:nvGraphicFramePr>
+        <p:xfrm>
+          <a:off x="457200" y="2573435"/>
+          <a:ext cx="4038601" cy="2531695"/>
+        </p:xfrm>
+        <a:graphic>
+          <a:graphicData uri="http://schemas.openxmlformats.org/drawingml/2006/table">
+            <a:tbl>
+              <a:tblPr>
+                <a:noFill/>
+              </a:tblPr>
+              <a:tblGrid>
+                <a:gridCol w="1681344">
+                  <a:extLst>
+                    <a:ext uri="{9D8B030D-6E8A-4147-A177-3AD203B41FA5}">
+                      <a16:colId xmlns:a16="http://schemas.microsoft.com/office/drawing/2014/main" val="3677942559"/>
+                    </a:ext>
+                  </a:extLst>
+                </a:gridCol>
+                <a:gridCol w="2357257">
+                  <a:extLst>
+                    <a:ext uri="{9D8B030D-6E8A-4147-A177-3AD203B41FA5}">
+                      <a16:colId xmlns:a16="http://schemas.microsoft.com/office/drawing/2014/main" val="3751326937"/>
+                    </a:ext>
+                  </a:extLst>
+                </a:gridCol>
+              </a:tblGrid>
+              <a:tr h="279267">
+                <a:tc>
+                  <a:txBody>
+                    <a:bodyPr/>
+                    <a:lstStyle/>
+                    <a:p>
+                      <a:pPr>
+                        <a:buNone/>
+                      </a:pPr>
+                      <a:r>
+                        <a:rPr lang="en-IE" sz="1300" b="1" cap="none" spc="0">
+                          <a:solidFill>
+                            <a:schemeClr val="tx1"/>
+                          </a:solidFill>
+                        </a:rPr>
+                        <a:t>Real-world action</a:t>
+                      </a:r>
+                    </a:p>
+                  </a:txBody>
+                  <a:tcPr marL="0" marR="47409" marT="23705" marB="23705" anchor="ctr">
+                    <a:lnL w="12700" cmpd="sng">
+                      <a:noFill/>
+                      <a:prstDash val="solid"/>
+                    </a:lnL>
+                    <a:lnR w="12700" cmpd="sng">
+                      <a:noFill/>
+                      <a:prstDash val="solid"/>
+                    </a:lnR>
+                    <a:lnT w="9525" cap="flat" cmpd="sng" algn="ctr">
+                      <a:solidFill>
+                        <a:schemeClr val="accent1"/>
+                      </a:solidFill>
+                      <a:prstDash val="solid"/>
+                    </a:lnT>
+                    <a:lnB w="12700" cmpd="sng">
+                      <a:noFill/>
+                      <a:prstDash val="solid"/>
+                    </a:lnB>
+                    <a:noFill/>
+                  </a:tcPr>
+                </a:tc>
+                <a:tc>
+                  <a:txBody>
+                    <a:bodyPr/>
+                    <a:lstStyle/>
+                    <a:p>
+                      <a:pPr>
+                        <a:buNone/>
+                      </a:pPr>
+                      <a:r>
+                        <a:rPr lang="en-IE" sz="1300" b="1" cap="none" spc="0" dirty="0">
+                          <a:solidFill>
+                            <a:schemeClr val="tx1"/>
+                          </a:solidFill>
+                        </a:rPr>
+                        <a:t>Programming equivalent</a:t>
+                      </a:r>
+                    </a:p>
+                  </a:txBody>
+                  <a:tcPr marL="0" marR="47409" marT="23705" marB="23705" anchor="ctr">
+                    <a:lnL w="12700" cmpd="sng">
+                      <a:noFill/>
+                      <a:prstDash val="solid"/>
+                    </a:lnL>
+                    <a:lnR w="12700" cmpd="sng">
+                      <a:noFill/>
+                      <a:prstDash val="solid"/>
+                    </a:lnR>
+                    <a:lnT w="9525" cap="flat" cmpd="sng" algn="ctr">
+                      <a:solidFill>
+                        <a:schemeClr val="accent1"/>
+                      </a:solidFill>
+                      <a:prstDash val="solid"/>
+                    </a:lnT>
+                    <a:lnB w="12700" cmpd="sng">
+                      <a:noFill/>
+                      <a:prstDash val="solid"/>
+                    </a:lnB>
+                    <a:noFill/>
+                  </a:tcPr>
+                </a:tc>
+                <a:extLst>
+                  <a:ext uri="{0D108BD9-81ED-4DB2-BD59-A6C34878D82A}">
+                    <a16:rowId xmlns:a16="http://schemas.microsoft.com/office/drawing/2014/main" val="2332903306"/>
+                  </a:ext>
+                </a:extLst>
+              </a:tr>
+              <a:tr h="665696">
+                <a:tc>
+                  <a:txBody>
+                    <a:bodyPr/>
+                    <a:lstStyle/>
+                    <a:p>
+                      <a:pPr>
+                        <a:buNone/>
+                      </a:pPr>
+                      <a:r>
+                        <a:rPr lang="en-US" sz="1300" cap="none" spc="0">
+                          <a:solidFill>
+                            <a:schemeClr val="tx1"/>
+                          </a:solidFill>
+                        </a:rPr>
+                        <a:t>Repeating ticket checks for each person</a:t>
+                      </a:r>
+                    </a:p>
+                  </a:txBody>
+                  <a:tcPr marL="0" marR="47409" marT="23705" marB="23705" anchor="ctr">
+                    <a:lnL w="12700" cmpd="sng">
+                      <a:noFill/>
+                      <a:prstDash val="solid"/>
+                    </a:lnL>
+                    <a:lnR w="12700" cmpd="sng">
+                      <a:noFill/>
+                      <a:prstDash val="solid"/>
+                    </a:lnR>
+                    <a:lnT w="12700" cmpd="sng">
+                      <a:noFill/>
+                      <a:prstDash val="solid"/>
+                    </a:lnT>
+                    <a:lnB w="12700" cmpd="sng">
+                      <a:noFill/>
+                      <a:prstDash val="solid"/>
+                    </a:lnB>
+                    <a:noFill/>
+                  </a:tcPr>
+                </a:tc>
+                <a:tc>
+                  <a:txBody>
+                    <a:bodyPr/>
+                    <a:lstStyle/>
+                    <a:p>
+                      <a:pPr>
+                        <a:buNone/>
+                      </a:pPr>
+                      <a:r>
+                        <a:rPr lang="en-US" sz="1300" cap="none" spc="0">
+                          <a:solidFill>
+                            <a:schemeClr val="tx1"/>
+                          </a:solidFill>
+                        </a:rPr>
+                        <a:t>Loop that repeats for each input</a:t>
+                      </a:r>
+                    </a:p>
+                  </a:txBody>
+                  <a:tcPr marL="0" marR="47409" marT="23705" marB="23705" anchor="ctr">
+                    <a:lnL w="12700" cmpd="sng">
+                      <a:noFill/>
+                      <a:prstDash val="solid"/>
+                    </a:lnL>
+                    <a:lnR w="12700" cmpd="sng">
+                      <a:noFill/>
+                      <a:prstDash val="solid"/>
+                    </a:lnR>
+                    <a:lnT w="12700" cmpd="sng">
+                      <a:noFill/>
+                      <a:prstDash val="solid"/>
+                    </a:lnT>
+                    <a:lnB w="12700" cmpd="sng">
+                      <a:noFill/>
+                      <a:prstDash val="solid"/>
+                    </a:lnB>
+                    <a:noFill/>
+                  </a:tcPr>
+                </a:tc>
+                <a:extLst>
+                  <a:ext uri="{0D108BD9-81ED-4DB2-BD59-A6C34878D82A}">
+                    <a16:rowId xmlns:a16="http://schemas.microsoft.com/office/drawing/2014/main" val="3925567467"/>
+                  </a:ext>
+                </a:extLst>
+              </a:tr>
+              <a:tr h="472481">
+                <a:tc>
+                  <a:txBody>
+                    <a:bodyPr/>
+                    <a:lstStyle/>
+                    <a:p>
+                      <a:pPr>
+                        <a:buNone/>
+                      </a:pPr>
+                      <a:r>
+                        <a:rPr lang="en-IE" sz="1300" cap="none" spc="0">
+                          <a:solidFill>
+                            <a:schemeClr val="tx1"/>
+                          </a:solidFill>
+                        </a:rPr>
+                        <a:t>Queue of people</a:t>
+                      </a:r>
+                    </a:p>
+                  </a:txBody>
+                  <a:tcPr marL="0" marR="47409" marT="23705" marB="23705" anchor="ctr">
+                    <a:lnL w="12700" cmpd="sng">
+                      <a:noFill/>
+                      <a:prstDash val="solid"/>
+                    </a:lnL>
+                    <a:lnR w="12700" cmpd="sng">
+                      <a:noFill/>
+                      <a:prstDash val="solid"/>
+                    </a:lnR>
+                    <a:lnT w="12700" cmpd="sng">
+                      <a:noFill/>
+                      <a:prstDash val="solid"/>
+                    </a:lnT>
+                    <a:lnB w="12700" cmpd="sng">
+                      <a:noFill/>
+                      <a:prstDash val="solid"/>
+                    </a:lnB>
+                    <a:noFill/>
+                  </a:tcPr>
+                </a:tc>
+                <a:tc>
+                  <a:txBody>
+                    <a:bodyPr/>
+                    <a:lstStyle/>
+                    <a:p>
+                      <a:pPr>
+                        <a:buNone/>
+                      </a:pPr>
+                      <a:r>
+                        <a:rPr lang="en-US" sz="1300" cap="none" spc="0">
+                          <a:solidFill>
+                            <a:schemeClr val="tx1"/>
+                          </a:solidFill>
+                        </a:rPr>
+                        <a:t>Data to process (e.g., list or unknown number of inputs)</a:t>
+                      </a:r>
+                    </a:p>
+                  </a:txBody>
+                  <a:tcPr marL="0" marR="47409" marT="23705" marB="23705" anchor="ctr">
+                    <a:lnL w="12700" cmpd="sng">
+                      <a:noFill/>
+                      <a:prstDash val="solid"/>
+                    </a:lnL>
+                    <a:lnR w="12700" cmpd="sng">
+                      <a:noFill/>
+                      <a:prstDash val="solid"/>
+                    </a:lnR>
+                    <a:lnT w="12700" cmpd="sng">
+                      <a:noFill/>
+                      <a:prstDash val="solid"/>
+                    </a:lnT>
+                    <a:lnB w="12700" cmpd="sng">
+                      <a:noFill/>
+                      <a:prstDash val="solid"/>
+                    </a:lnB>
+                    <a:noFill/>
+                  </a:tcPr>
+                </a:tc>
+                <a:extLst>
+                  <a:ext uri="{0D108BD9-81ED-4DB2-BD59-A6C34878D82A}">
+                    <a16:rowId xmlns:a16="http://schemas.microsoft.com/office/drawing/2014/main" val="1632319758"/>
+                  </a:ext>
+                </a:extLst>
+              </a:tr>
+              <a:tr h="630339">
+                <a:tc>
+                  <a:txBody>
+                    <a:bodyPr/>
+                    <a:lstStyle/>
+                    <a:p>
+                      <a:pPr>
+                        <a:buNone/>
+                      </a:pPr>
+                      <a:r>
+                        <a:rPr lang="en-US" sz="1300" cap="none" spc="0" dirty="0">
+                          <a:solidFill>
+                            <a:schemeClr val="tx1"/>
+                          </a:solidFill>
+                        </a:rPr>
+                        <a:t>Stop when no more people or reached a certain number</a:t>
+                      </a:r>
+                    </a:p>
+                  </a:txBody>
+                  <a:tcPr marL="0" marR="47409" marT="23705" marB="23705" anchor="ctr">
+                    <a:lnL w="12700" cmpd="sng">
+                      <a:noFill/>
+                      <a:prstDash val="solid"/>
+                    </a:lnL>
+                    <a:lnR w="12700" cmpd="sng">
+                      <a:noFill/>
+                      <a:prstDash val="solid"/>
+                    </a:lnR>
+                    <a:lnT w="12700" cmpd="sng">
+                      <a:noFill/>
+                      <a:prstDash val="solid"/>
+                    </a:lnT>
+                    <a:lnB w="12700" cmpd="sng">
+                      <a:noFill/>
+                      <a:prstDash val="solid"/>
+                    </a:lnB>
+                    <a:noFill/>
+                  </a:tcPr>
+                </a:tc>
+                <a:tc>
+                  <a:txBody>
+                    <a:bodyPr/>
+                    <a:lstStyle/>
+                    <a:p>
+                      <a:pPr>
+                        <a:buNone/>
+                      </a:pPr>
+                      <a:r>
+                        <a:rPr lang="en-IE" sz="1300" cap="none" spc="0">
+                          <a:solidFill>
+                            <a:schemeClr val="tx1"/>
+                          </a:solidFill>
+                        </a:rPr>
+                        <a:t>Loop termination condition</a:t>
+                      </a:r>
+                    </a:p>
+                  </a:txBody>
+                  <a:tcPr marL="0" marR="47409" marT="23705" marB="23705" anchor="ctr">
+                    <a:lnL w="12700" cmpd="sng">
+                      <a:noFill/>
+                      <a:prstDash val="solid"/>
+                    </a:lnL>
+                    <a:lnR w="12700" cmpd="sng">
+                      <a:noFill/>
+                      <a:prstDash val="solid"/>
+                    </a:lnR>
+                    <a:lnT w="12700" cmpd="sng">
+                      <a:noFill/>
+                      <a:prstDash val="solid"/>
+                    </a:lnT>
+                    <a:lnB w="12700" cmpd="sng">
+                      <a:noFill/>
+                      <a:prstDash val="solid"/>
+                    </a:lnB>
+                    <a:noFill/>
+                  </a:tcPr>
+                </a:tc>
+                <a:extLst>
+                  <a:ext uri="{0D108BD9-81ED-4DB2-BD59-A6C34878D82A}">
+                    <a16:rowId xmlns:a16="http://schemas.microsoft.com/office/drawing/2014/main" val="644145912"/>
+                  </a:ext>
+                </a:extLst>
+              </a:tr>
+              <a:tr h="472481">
+                <a:tc>
+                  <a:txBody>
+                    <a:bodyPr/>
+                    <a:lstStyle/>
+                    <a:p>
+                      <a:pPr>
+                        <a:buNone/>
+                      </a:pPr>
+                      <a:r>
+                        <a:rPr lang="en-IE" sz="1300" cap="none" spc="0">
+                          <a:solidFill>
+                            <a:schemeClr val="tx1"/>
+                          </a:solidFill>
+                        </a:rPr>
+                        <a:t>Counting valid tickets</a:t>
+                      </a:r>
+                    </a:p>
+                  </a:txBody>
+                  <a:tcPr marL="0" marR="47409" marT="23705" marB="23705" anchor="ctr">
+                    <a:lnL w="12700" cmpd="sng">
+                      <a:noFill/>
+                      <a:prstDash val="solid"/>
+                    </a:lnL>
+                    <a:lnR w="12700" cmpd="sng">
+                      <a:noFill/>
+                      <a:prstDash val="solid"/>
+                    </a:lnR>
+                    <a:lnT w="12700" cmpd="sng">
+                      <a:noFill/>
+                      <a:prstDash val="solid"/>
+                    </a:lnT>
+                    <a:lnB w="12700" cmpd="sng">
+                      <a:noFill/>
+                      <a:prstDash val="solid"/>
+                    </a:lnB>
+                    <a:noFill/>
+                  </a:tcPr>
+                </a:tc>
+                <a:tc>
+                  <a:txBody>
+                    <a:bodyPr/>
+                    <a:lstStyle/>
+                    <a:p>
+                      <a:pPr>
+                        <a:buNone/>
+                      </a:pPr>
+                      <a:r>
+                        <a:rPr lang="en-US" sz="1300" cap="none" spc="0" dirty="0">
+                          <a:solidFill>
+                            <a:schemeClr val="tx1"/>
+                          </a:solidFill>
+                        </a:rPr>
+                        <a:t>Using a counter variable inside the loop</a:t>
+                      </a:r>
+                    </a:p>
+                  </a:txBody>
+                  <a:tcPr marL="0" marR="47409" marT="23705" marB="23705" anchor="ctr">
+                    <a:lnL w="12700" cmpd="sng">
+                      <a:noFill/>
+                      <a:prstDash val="solid"/>
+                    </a:lnL>
+                    <a:lnR w="12700" cmpd="sng">
+                      <a:noFill/>
+                      <a:prstDash val="solid"/>
+                    </a:lnR>
+                    <a:lnT w="12700" cmpd="sng">
+                      <a:noFill/>
+                      <a:prstDash val="solid"/>
+                    </a:lnT>
+                    <a:lnB w="12700" cmpd="sng">
+                      <a:noFill/>
+                      <a:prstDash val="solid"/>
+                    </a:lnB>
+                    <a:noFill/>
+                  </a:tcPr>
+                </a:tc>
+                <a:extLst>
+                  <a:ext uri="{0D108BD9-81ED-4DB2-BD59-A6C34878D82A}">
+                    <a16:rowId xmlns:a16="http://schemas.microsoft.com/office/drawing/2014/main" val="3887234076"/>
+                  </a:ext>
+                </a:extLst>
+              </a:tr>
+            </a:tbl>
+          </a:graphicData>
+        </a:graphic>
+      </p:graphicFrame>
+    </p:spTree>
+    <p:extLst>
+      <p:ext uri="{BB962C8B-B14F-4D97-AF65-F5344CB8AC3E}">
+        <p14:creationId xmlns:p14="http://schemas.microsoft.com/office/powerpoint/2010/main" val="2927026019"/>
+      </p:ext>
+    </p:extLst>
+  </p:cSld>
+  <p:clrMapOvr>
+    <a:masterClrMapping/>
+  </p:clrMapOvr>
+</p:sld>
+</file>
+
+<file path=ppt/slides/slide7.xml><?xml version="1.0" encoding="utf-8"?>
+<p:sld xmlns:a="http://schemas.openxmlformats.org/drawingml/2006/main" xmlns:r="http://schemas.openxmlformats.org/officeDocument/2006/relationships" xmlns:p="http://schemas.openxmlformats.org/presentationml/2006/main">
+  <p:cSld>
+    <p:spTree>
+      <p:nvGrpSpPr>
+        <p:cNvPr id="1" name=""/>
+        <p:cNvGrpSpPr/>
+        <p:nvPr/>
+      </p:nvGrpSpPr>
+      <p:grpSpPr>
+        <a:xfrm>
+          <a:off x="0" y="0"/>
+          <a:ext cx="0" cy="0"/>
+          <a:chOff x="0" y="0"/>
+          <a:chExt cx="0" cy="0"/>
+        </a:xfrm>
+      </p:grpSpPr>
+      <p:sp>
+        <p:nvSpPr>
+          <p:cNvPr id="6145" name="Rectangle 2"/>
+          <p:cNvSpPr>
+            <a:spLocks noGrp="1" noChangeArrowheads="1"/>
+          </p:cNvSpPr>
+          <p:nvPr>
+            <p:ph type="title"/>
+          </p:nvPr>
+        </p:nvSpPr>
+        <p:spPr/>
+        <p:txBody>
+          <a:bodyPr/>
+          <a:lstStyle/>
+          <a:p>
+            <a:r>
+              <a:rPr lang="en-US" altLang="en-US" dirty="0"/>
               <a:t>Repetition without loop</a:t>
             </a:r>
           </a:p>
@@ -13349,7 +15953,7 @@
 </p:sld>
 </file>
 
-<file path=ppt/slides/slide6.xml><?xml version="1.0" encoding="utf-8"?>
+<file path=ppt/slides/slide8.xml><?xml version="1.0" encoding="utf-8"?>
 <p:sld xmlns:a="http://schemas.openxmlformats.org/drawingml/2006/main" xmlns:r="http://schemas.openxmlformats.org/officeDocument/2006/relationships" xmlns:p="http://schemas.openxmlformats.org/presentationml/2006/main">
   <p:cSld>
     <p:spTree>
@@ -14050,7 +16654,7 @@
 </p:sld>
 </file>
 
-<file path=ppt/slides/slide7.xml><?xml version="1.0" encoding="utf-8"?>
+<file path=ppt/slides/slide9.xml><?xml version="1.0" encoding="utf-8"?>
 <p:sld xmlns:a="http://schemas.openxmlformats.org/drawingml/2006/main" xmlns:r="http://schemas.openxmlformats.org/officeDocument/2006/relationships" xmlns:p="http://schemas.openxmlformats.org/presentationml/2006/main">
   <p:cSld>
     <p:spTree>
@@ -15100,700 +17704,6 @@
 </p:sld>
 </file>
 
-<file path=ppt/slides/slide8.xml><?xml version="1.0" encoding="utf-8"?>
-<p:sld xmlns:a="http://schemas.openxmlformats.org/drawingml/2006/main" xmlns:r="http://schemas.openxmlformats.org/officeDocument/2006/relationships" xmlns:p="http://schemas.openxmlformats.org/presentationml/2006/main">
-  <p:cSld>
-    <p:spTree>
-      <p:nvGrpSpPr>
-        <p:cNvPr id="1" name=""/>
-        <p:cNvGrpSpPr/>
-        <p:nvPr/>
-      </p:nvGrpSpPr>
-      <p:grpSpPr>
-        <a:xfrm>
-          <a:off x="0" y="0"/>
-          <a:ext cx="0" cy="0"/>
-          <a:chOff x="0" y="0"/>
-          <a:chExt cx="0" cy="0"/>
-        </a:xfrm>
-      </p:grpSpPr>
-      <p:sp>
-        <p:nvSpPr>
-          <p:cNvPr id="2" name="Title 1"/>
-          <p:cNvSpPr>
-            <a:spLocks noGrp="1"/>
-          </p:cNvSpPr>
-          <p:nvPr>
-            <p:ph type="title"/>
-          </p:nvPr>
-        </p:nvSpPr>
-        <p:spPr/>
-        <p:txBody>
-          <a:bodyPr/>
-          <a:lstStyle/>
-          <a:p>
-            <a:r>
-              <a:rPr lang="en-IE"/>
-              <a:t>Topics list</a:t>
-            </a:r>
-            <a:endParaRPr lang="en-IE" dirty="0"/>
-          </a:p>
-        </p:txBody>
-      </p:sp>
-      <p:sp>
-        <p:nvSpPr>
-          <p:cNvPr id="5" name="Content Placeholder 4"/>
-          <p:cNvSpPr>
-            <a:spLocks noGrp="1"/>
-          </p:cNvSpPr>
-          <p:nvPr>
-            <p:ph idx="1"/>
-          </p:nvPr>
-        </p:nvSpPr>
-        <p:spPr/>
-        <p:txBody>
-          <a:bodyPr>
-            <a:normAutofit/>
-          </a:bodyPr>
-          <a:lstStyle/>
-          <a:p>
-            <a:endParaRPr lang="en-IE" dirty="0"/>
-          </a:p>
-          <a:p>
-            <a:pPr marL="0" indent="0">
-              <a:buNone/>
-            </a:pPr>
-            <a:endParaRPr lang="en-IE" dirty="0"/>
-          </a:p>
-          <a:p>
-            <a:pPr marL="514350" indent="-514350">
-              <a:buFont typeface="+mj-lt"/>
-              <a:buAutoNum type="arabicPeriod"/>
-            </a:pPr>
-            <a:r>
-              <a:rPr lang="en-IE" dirty="0"/>
-              <a:t>Repetition in Programming – Intro to looping</a:t>
-            </a:r>
-          </a:p>
-          <a:p>
-            <a:endParaRPr lang="en-IE" dirty="0"/>
-          </a:p>
-          <a:p>
-            <a:pPr marL="514350" indent="-514350">
-              <a:buFont typeface="+mj-lt"/>
-              <a:buAutoNum type="arabicPeriod" startAt="2"/>
-            </a:pPr>
-            <a:r>
-              <a:rPr lang="en-IE" dirty="0"/>
-              <a:t>Use of loops (while loops).</a:t>
-            </a:r>
-          </a:p>
-          <a:p>
-            <a:pPr marL="0" indent="0">
-              <a:buNone/>
-            </a:pPr>
-            <a:endParaRPr lang="en-IE" dirty="0"/>
-          </a:p>
-        </p:txBody>
-      </p:sp>
-      <p:sp>
-        <p:nvSpPr>
-          <p:cNvPr id="6" name="Rectangle 5"/>
-          <p:cNvSpPr/>
-          <p:nvPr/>
-        </p:nvSpPr>
-        <p:spPr>
-          <a:xfrm>
-            <a:off x="457200" y="3347712"/>
-            <a:ext cx="4419600" cy="533400"/>
-          </a:xfrm>
-          <a:prstGeom prst="rect">
-            <a:avLst/>
-          </a:prstGeom>
-          <a:noFill/>
-          <a:ln w="44450">
-            <a:solidFill>
-              <a:srgbClr val="FF0000"/>
-            </a:solidFill>
-          </a:ln>
-        </p:spPr>
-        <p:style>
-          <a:lnRef idx="2">
-            <a:schemeClr val="accent1">
-              <a:shade val="50000"/>
-            </a:schemeClr>
-          </a:lnRef>
-          <a:fillRef idx="1">
-            <a:schemeClr val="accent1"/>
-          </a:fillRef>
-          <a:effectRef idx="0">
-            <a:schemeClr val="accent1"/>
-          </a:effectRef>
-          <a:fontRef idx="minor">
-            <a:schemeClr val="lt1"/>
-          </a:fontRef>
-        </p:style>
-        <p:txBody>
-          <a:bodyPr rtlCol="0" anchor="ctr"/>
-          <a:lstStyle/>
-          <a:p>
-            <a:pPr algn="ctr"/>
-            <a:endParaRPr lang="en-IE"/>
-          </a:p>
-        </p:txBody>
-      </p:sp>
-    </p:spTree>
-    <p:extLst>
-      <p:ext uri="{BB962C8B-B14F-4D97-AF65-F5344CB8AC3E}">
-        <p14:creationId xmlns:p14="http://schemas.microsoft.com/office/powerpoint/2010/main" val="1727151845"/>
-      </p:ext>
-    </p:extLst>
-  </p:cSld>
-  <p:clrMapOvr>
-    <a:masterClrMapping/>
-  </p:clrMapOvr>
-  <p:timing>
-    <p:tnLst>
-      <p:par>
-        <p:cTn id="1" dur="indefinite" restart="never" nodeType="tmRoot">
-          <p:childTnLst>
-            <p:seq concurrent="1" nextAc="seek">
-              <p:cTn id="2" dur="indefinite" nodeType="mainSeq">
-                <p:childTnLst>
-                  <p:par>
-                    <p:cTn id="3" fill="hold">
-                      <p:stCondLst>
-                        <p:cond delay="indefinite"/>
-                      </p:stCondLst>
-                      <p:childTnLst>
-                        <p:par>
-                          <p:cTn id="4" fill="hold">
-                            <p:stCondLst>
-                              <p:cond delay="0"/>
-                            </p:stCondLst>
-                            <p:childTnLst>
-                              <p:par>
-                                <p:cTn id="5" presetID="21" presetClass="entr" presetSubtype="1" fill="hold" grpId="0" nodeType="clickEffect">
-                                  <p:stCondLst>
-                                    <p:cond delay="0"/>
-                                  </p:stCondLst>
-                                  <p:childTnLst>
-                                    <p:set>
-                                      <p:cBhvr>
-                                        <p:cTn id="6" dur="1" fill="hold">
-                                          <p:stCondLst>
-                                            <p:cond delay="0"/>
-                                          </p:stCondLst>
-                                        </p:cTn>
-                                        <p:tgtEl>
-                                          <p:spTgt spid="6"/>
-                                        </p:tgtEl>
-                                        <p:attrNameLst>
-                                          <p:attrName>style.visibility</p:attrName>
-                                        </p:attrNameLst>
-                                      </p:cBhvr>
-                                      <p:to>
-                                        <p:strVal val="visible"/>
-                                      </p:to>
-                                    </p:set>
-                                    <p:animEffect transition="in" filter="wheel(1)">
-                                      <p:cBhvr>
-                                        <p:cTn id="7" dur="2000"/>
-                                        <p:tgtEl>
-                                          <p:spTgt spid="6"/>
-                                        </p:tgtEl>
-                                      </p:cBhvr>
-                                    </p:animEffect>
-                                  </p:childTnLst>
-                                </p:cTn>
-                              </p:par>
-                            </p:childTnLst>
-                          </p:cTn>
-                        </p:par>
-                      </p:childTnLst>
-                    </p:cTn>
-                  </p:par>
-                </p:childTnLst>
-              </p:cTn>
-              <p:prevCondLst>
-                <p:cond evt="onPrev" delay="0">
-                  <p:tgtEl>
-                    <p:sldTgt/>
-                  </p:tgtEl>
-                </p:cond>
-              </p:prevCondLst>
-              <p:nextCondLst>
-                <p:cond evt="onNext" delay="0">
-                  <p:tgtEl>
-                    <p:sldTgt/>
-                  </p:tgtEl>
-                </p:cond>
-              </p:nextCondLst>
-            </p:seq>
-          </p:childTnLst>
-        </p:cTn>
-      </p:par>
-    </p:tnLst>
-    <p:bldLst>
-      <p:bldP spid="6" grpId="0" animBg="1"/>
-    </p:bldLst>
-  </p:timing>
-</p:sld>
-</file>
-
-<file path=ppt/slides/slide9.xml><?xml version="1.0" encoding="utf-8"?>
-<p:sld xmlns:a="http://schemas.openxmlformats.org/drawingml/2006/main" xmlns:r="http://schemas.openxmlformats.org/officeDocument/2006/relationships" xmlns:p="http://schemas.openxmlformats.org/presentationml/2006/main">
-  <p:cSld>
-    <p:spTree>
-      <p:nvGrpSpPr>
-        <p:cNvPr id="1" name=""/>
-        <p:cNvGrpSpPr/>
-        <p:nvPr/>
-      </p:nvGrpSpPr>
-      <p:grpSpPr>
-        <a:xfrm>
-          <a:off x="0" y="0"/>
-          <a:ext cx="0" cy="0"/>
-          <a:chOff x="0" y="0"/>
-          <a:chExt cx="0" cy="0"/>
-        </a:xfrm>
-      </p:grpSpPr>
-      <p:sp>
-        <p:nvSpPr>
-          <p:cNvPr id="2" name="Title 1"/>
-          <p:cNvSpPr>
-            <a:spLocks noGrp="1"/>
-          </p:cNvSpPr>
-          <p:nvPr>
-            <p:ph type="title"/>
-          </p:nvPr>
-        </p:nvSpPr>
-        <p:spPr/>
-        <p:txBody>
-          <a:bodyPr/>
-          <a:lstStyle/>
-          <a:p>
-            <a:r>
-              <a:rPr lang="en-IE" dirty="0"/>
-              <a:t>Loops in Programming</a:t>
-            </a:r>
-          </a:p>
-        </p:txBody>
-      </p:sp>
-      <p:sp>
-        <p:nvSpPr>
-          <p:cNvPr id="3" name="Content Placeholder 2"/>
-          <p:cNvSpPr>
-            <a:spLocks noGrp="1"/>
-          </p:cNvSpPr>
-          <p:nvPr>
-            <p:ph idx="1"/>
-          </p:nvPr>
-        </p:nvSpPr>
-        <p:spPr/>
-        <p:txBody>
-          <a:bodyPr/>
-          <a:lstStyle/>
-          <a:p>
-            <a:r>
-              <a:rPr lang="en-IE" dirty="0"/>
-              <a:t>There are three types of loop in (Java) programming:</a:t>
-            </a:r>
-          </a:p>
-          <a:p>
-            <a:endParaRPr lang="en-IE" dirty="0"/>
-          </a:p>
-          <a:p>
-            <a:pPr lvl="1"/>
-            <a:r>
-              <a:rPr lang="en-IE" b="1" dirty="0"/>
-              <a:t>while</a:t>
-            </a:r>
-            <a:r>
-              <a:rPr lang="en-IE" dirty="0"/>
-              <a:t> loops</a:t>
-            </a:r>
-          </a:p>
-          <a:p>
-            <a:pPr lvl="1"/>
-            <a:r>
-              <a:rPr lang="en-IE" b="1" dirty="0"/>
-              <a:t>for</a:t>
-            </a:r>
-            <a:r>
-              <a:rPr lang="en-IE" dirty="0"/>
-              <a:t> loops</a:t>
-            </a:r>
-          </a:p>
-          <a:p>
-            <a:pPr lvl="1"/>
-            <a:r>
-              <a:rPr lang="en-IE" b="1" dirty="0"/>
-              <a:t>do while</a:t>
-            </a:r>
-            <a:r>
-              <a:rPr lang="en-IE" dirty="0"/>
-              <a:t> loops</a:t>
-            </a:r>
-          </a:p>
-          <a:p>
-            <a:pPr lvl="1"/>
-            <a:endParaRPr lang="en-IE" dirty="0"/>
-          </a:p>
-        </p:txBody>
-      </p:sp>
-    </p:spTree>
-    <p:extLst>
-      <p:ext uri="{BB962C8B-B14F-4D97-AF65-F5344CB8AC3E}">
-        <p14:creationId xmlns:p14="http://schemas.microsoft.com/office/powerpoint/2010/main" val="2874484904"/>
-      </p:ext>
-    </p:extLst>
-  </p:cSld>
-  <p:clrMapOvr>
-    <a:masterClrMapping/>
-  </p:clrMapOvr>
-  <p:timing>
-    <p:tnLst>
-      <p:par>
-        <p:cTn id="1" dur="indefinite" restart="never" nodeType="tmRoot">
-          <p:childTnLst>
-            <p:seq concurrent="1" nextAc="seek">
-              <p:cTn id="2" dur="indefinite" nodeType="mainSeq">
-                <p:childTnLst>
-                  <p:par>
-                    <p:cTn id="3" fill="hold">
-                      <p:stCondLst>
-                        <p:cond delay="indefinite"/>
-                      </p:stCondLst>
-                      <p:childTnLst>
-                        <p:par>
-                          <p:cTn id="4" fill="hold">
-                            <p:stCondLst>
-                              <p:cond delay="0"/>
-                            </p:stCondLst>
-                            <p:childTnLst>
-                              <p:par>
-                                <p:cTn id="5" presetID="2" presetClass="entr" presetSubtype="4" fill="hold" nodeType="clickEffect">
-                                  <p:stCondLst>
-                                    <p:cond delay="0"/>
-                                  </p:stCondLst>
-                                  <p:childTnLst>
-                                    <p:set>
-                                      <p:cBhvr>
-                                        <p:cTn id="6" dur="1" fill="hold">
-                                          <p:stCondLst>
-                                            <p:cond delay="0"/>
-                                          </p:stCondLst>
-                                        </p:cTn>
-                                        <p:tgtEl>
-                                          <p:spTgt spid="3">
-                                            <p:txEl>
-                                              <p:pRg st="2" end="2"/>
-                                            </p:txEl>
-                                          </p:spTgt>
-                                        </p:tgtEl>
-                                        <p:attrNameLst>
-                                          <p:attrName>style.visibility</p:attrName>
-                                        </p:attrNameLst>
-                                      </p:cBhvr>
-                                      <p:to>
-                                        <p:strVal val="visible"/>
-                                      </p:to>
-                                    </p:set>
-                                    <p:anim calcmode="lin" valueType="num">
-                                      <p:cBhvr additive="base">
-                                        <p:cTn id="7" dur="500" fill="hold"/>
-                                        <p:tgtEl>
-                                          <p:spTgt spid="3">
-                                            <p:txEl>
-                                              <p:pRg st="2" end="2"/>
-                                            </p:txEl>
-                                          </p:spTgt>
-                                        </p:tgtEl>
-                                        <p:attrNameLst>
-                                          <p:attrName>ppt_x</p:attrName>
-                                        </p:attrNameLst>
-                                      </p:cBhvr>
-                                      <p:tavLst>
-                                        <p:tav tm="0">
-                                          <p:val>
-                                            <p:strVal val="#ppt_x"/>
-                                          </p:val>
-                                        </p:tav>
-                                        <p:tav tm="100000">
-                                          <p:val>
-                                            <p:strVal val="#ppt_x"/>
-                                          </p:val>
-                                        </p:tav>
-                                      </p:tavLst>
-                                    </p:anim>
-                                    <p:anim calcmode="lin" valueType="num">
-                                      <p:cBhvr additive="base">
-                                        <p:cTn id="8" dur="500" fill="hold"/>
-                                        <p:tgtEl>
-                                          <p:spTgt spid="3">
-                                            <p:txEl>
-                                              <p:pRg st="2" end="2"/>
-                                            </p:txEl>
-                                          </p:spTgt>
-                                        </p:tgtEl>
-                                        <p:attrNameLst>
-                                          <p:attrName>ppt_y</p:attrName>
-                                        </p:attrNameLst>
-                                      </p:cBhvr>
-                                      <p:tavLst>
-                                        <p:tav tm="0">
-                                          <p:val>
-                                            <p:strVal val="1+#ppt_h/2"/>
-                                          </p:val>
-                                        </p:tav>
-                                        <p:tav tm="100000">
-                                          <p:val>
-                                            <p:strVal val="#ppt_y"/>
-                                          </p:val>
-                                        </p:tav>
-                                      </p:tavLst>
-                                    </p:anim>
-                                  </p:childTnLst>
-                                </p:cTn>
-                              </p:par>
-                            </p:childTnLst>
-                          </p:cTn>
-                        </p:par>
-                      </p:childTnLst>
-                    </p:cTn>
-                  </p:par>
-                  <p:par>
-                    <p:cTn id="9" fill="hold">
-                      <p:stCondLst>
-                        <p:cond delay="indefinite"/>
-                      </p:stCondLst>
-                      <p:childTnLst>
-                        <p:par>
-                          <p:cTn id="10" fill="hold">
-                            <p:stCondLst>
-                              <p:cond delay="0"/>
-                            </p:stCondLst>
-                            <p:childTnLst>
-                              <p:par>
-                                <p:cTn id="11" presetID="2" presetClass="entr" presetSubtype="4" fill="hold" nodeType="clickEffect">
-                                  <p:stCondLst>
-                                    <p:cond delay="0"/>
-                                  </p:stCondLst>
-                                  <p:childTnLst>
-                                    <p:set>
-                                      <p:cBhvr>
-                                        <p:cTn id="12" dur="1" fill="hold">
-                                          <p:stCondLst>
-                                            <p:cond delay="0"/>
-                                          </p:stCondLst>
-                                        </p:cTn>
-                                        <p:tgtEl>
-                                          <p:spTgt spid="3">
-                                            <p:txEl>
-                                              <p:pRg st="3" end="3"/>
-                                            </p:txEl>
-                                          </p:spTgt>
-                                        </p:tgtEl>
-                                        <p:attrNameLst>
-                                          <p:attrName>style.visibility</p:attrName>
-                                        </p:attrNameLst>
-                                      </p:cBhvr>
-                                      <p:to>
-                                        <p:strVal val="visible"/>
-                                      </p:to>
-                                    </p:set>
-                                    <p:anim calcmode="lin" valueType="num">
-                                      <p:cBhvr additive="base">
-                                        <p:cTn id="13" dur="500" fill="hold"/>
-                                        <p:tgtEl>
-                                          <p:spTgt spid="3">
-                                            <p:txEl>
-                                              <p:pRg st="3" end="3"/>
-                                            </p:txEl>
-                                          </p:spTgt>
-                                        </p:tgtEl>
-                                        <p:attrNameLst>
-                                          <p:attrName>ppt_x</p:attrName>
-                                        </p:attrNameLst>
-                                      </p:cBhvr>
-                                      <p:tavLst>
-                                        <p:tav tm="0">
-                                          <p:val>
-                                            <p:strVal val="#ppt_x"/>
-                                          </p:val>
-                                        </p:tav>
-                                        <p:tav tm="100000">
-                                          <p:val>
-                                            <p:strVal val="#ppt_x"/>
-                                          </p:val>
-                                        </p:tav>
-                                      </p:tavLst>
-                                    </p:anim>
-                                    <p:anim calcmode="lin" valueType="num">
-                                      <p:cBhvr additive="base">
-                                        <p:cTn id="14" dur="500" fill="hold"/>
-                                        <p:tgtEl>
-                                          <p:spTgt spid="3">
-                                            <p:txEl>
-                                              <p:pRg st="3" end="3"/>
-                                            </p:txEl>
-                                          </p:spTgt>
-                                        </p:tgtEl>
-                                        <p:attrNameLst>
-                                          <p:attrName>ppt_y</p:attrName>
-                                        </p:attrNameLst>
-                                      </p:cBhvr>
-                                      <p:tavLst>
-                                        <p:tav tm="0">
-                                          <p:val>
-                                            <p:strVal val="1+#ppt_h/2"/>
-                                          </p:val>
-                                        </p:tav>
-                                        <p:tav tm="100000">
-                                          <p:val>
-                                            <p:strVal val="#ppt_y"/>
-                                          </p:val>
-                                        </p:tav>
-                                      </p:tavLst>
-                                    </p:anim>
-                                  </p:childTnLst>
-                                </p:cTn>
-                              </p:par>
-                            </p:childTnLst>
-                          </p:cTn>
-                        </p:par>
-                      </p:childTnLst>
-                    </p:cTn>
-                  </p:par>
-                  <p:par>
-                    <p:cTn id="15" fill="hold">
-                      <p:stCondLst>
-                        <p:cond delay="indefinite"/>
-                      </p:stCondLst>
-                      <p:childTnLst>
-                        <p:par>
-                          <p:cTn id="16" fill="hold">
-                            <p:stCondLst>
-                              <p:cond delay="0"/>
-                            </p:stCondLst>
-                            <p:childTnLst>
-                              <p:par>
-                                <p:cTn id="17" presetID="2" presetClass="entr" presetSubtype="4" fill="hold" nodeType="clickEffect">
-                                  <p:stCondLst>
-                                    <p:cond delay="0"/>
-                                  </p:stCondLst>
-                                  <p:childTnLst>
-                                    <p:set>
-                                      <p:cBhvr>
-                                        <p:cTn id="18" dur="1" fill="hold">
-                                          <p:stCondLst>
-                                            <p:cond delay="0"/>
-                                          </p:stCondLst>
-                                        </p:cTn>
-                                        <p:tgtEl>
-                                          <p:spTgt spid="3">
-                                            <p:txEl>
-                                              <p:pRg st="4" end="4"/>
-                                            </p:txEl>
-                                          </p:spTgt>
-                                        </p:tgtEl>
-                                        <p:attrNameLst>
-                                          <p:attrName>style.visibility</p:attrName>
-                                        </p:attrNameLst>
-                                      </p:cBhvr>
-                                      <p:to>
-                                        <p:strVal val="visible"/>
-                                      </p:to>
-                                    </p:set>
-                                    <p:anim calcmode="lin" valueType="num">
-                                      <p:cBhvr additive="base">
-                                        <p:cTn id="19" dur="500" fill="hold"/>
-                                        <p:tgtEl>
-                                          <p:spTgt spid="3">
-                                            <p:txEl>
-                                              <p:pRg st="4" end="4"/>
-                                            </p:txEl>
-                                          </p:spTgt>
-                                        </p:tgtEl>
-                                        <p:attrNameLst>
-                                          <p:attrName>ppt_x</p:attrName>
-                                        </p:attrNameLst>
-                                      </p:cBhvr>
-                                      <p:tavLst>
-                                        <p:tav tm="0">
-                                          <p:val>
-                                            <p:strVal val="#ppt_x"/>
-                                          </p:val>
-                                        </p:tav>
-                                        <p:tav tm="100000">
-                                          <p:val>
-                                            <p:strVal val="#ppt_x"/>
-                                          </p:val>
-                                        </p:tav>
-                                      </p:tavLst>
-                                    </p:anim>
-                                    <p:anim calcmode="lin" valueType="num">
-                                      <p:cBhvr additive="base">
-                                        <p:cTn id="20" dur="500" fill="hold"/>
-                                        <p:tgtEl>
-                                          <p:spTgt spid="3">
-                                            <p:txEl>
-                                              <p:pRg st="4" end="4"/>
-                                            </p:txEl>
-                                          </p:spTgt>
-                                        </p:tgtEl>
-                                        <p:attrNameLst>
-                                          <p:attrName>ppt_y</p:attrName>
-                                        </p:attrNameLst>
-                                      </p:cBhvr>
-                                      <p:tavLst>
-                                        <p:tav tm="0">
-                                          <p:val>
-                                            <p:strVal val="1+#ppt_h/2"/>
-                                          </p:val>
-                                        </p:tav>
-                                        <p:tav tm="100000">
-                                          <p:val>
-                                            <p:strVal val="#ppt_y"/>
-                                          </p:val>
-                                        </p:tav>
-                                      </p:tavLst>
-                                    </p:anim>
-                                  </p:childTnLst>
-                                </p:cTn>
-                              </p:par>
-                            </p:childTnLst>
-                          </p:cTn>
-                        </p:par>
-                      </p:childTnLst>
-                    </p:cTn>
-                  </p:par>
-                </p:childTnLst>
-              </p:cTn>
-              <p:prevCondLst>
-                <p:cond evt="onPrev" delay="0">
-                  <p:tgtEl>
-                    <p:sldTgt/>
-                  </p:tgtEl>
-                </p:cond>
-              </p:prevCondLst>
-              <p:nextCondLst>
-                <p:cond evt="onNext" delay="0">
-                  <p:tgtEl>
-                    <p:sldTgt/>
-                  </p:tgtEl>
-                </p:cond>
-              </p:nextCondLst>
-            </p:seq>
-          </p:childTnLst>
-        </p:cTn>
-      </p:par>
-    </p:tnLst>
-  </p:timing>
-</p:sld>
-</file>
-
 <file path=ppt/theme/theme1.xml><?xml version="1.0" encoding="utf-8"?>
 <a:theme xmlns:a="http://schemas.openxmlformats.org/drawingml/2006/main" name="a-processing-mouse-event-methods">
   <a:themeElements>
